--- a/materials/材料学.pptx
+++ b/materials/材料学.pptx
@@ -119,6 +119,2368 @@
 </p:presentation>
 </file>
 
+<file path=ppt/diagrams/colors1.xml><?xml version="1.0" encoding="utf-8"?>
+<dgm:colorsDef xmlns:dgm="http://schemas.openxmlformats.org/drawingml/2006/diagram" xmlns:a="http://schemas.openxmlformats.org/drawingml/2006/main" uniqueId="urn:microsoft.com/office/officeart/2005/8/colors/accent1_2">
+  <dgm:title val=""/>
+  <dgm:desc val=""/>
+  <dgm:catLst>
+    <dgm:cat type="accent1" pri="11200"/>
+  </dgm:catLst>
+  <dgm:styleLbl name="node0">
+    <dgm:fillClrLst meth="repeat">
+      <a:schemeClr val="accent1"/>
+    </dgm:fillClrLst>
+    <dgm:linClrLst meth="repeat">
+      <a:schemeClr val="lt1"/>
+    </dgm:linClrLst>
+    <dgm:effectClrLst/>
+    <dgm:txLinClrLst/>
+    <dgm:txFillClrLst/>
+    <dgm:txEffectClrLst/>
+  </dgm:styleLbl>
+  <dgm:styleLbl name="alignNode1">
+    <dgm:fillClrLst meth="repeat">
+      <a:schemeClr val="accent1"/>
+    </dgm:fillClrLst>
+    <dgm:linClrLst meth="repeat">
+      <a:schemeClr val="accent1"/>
+    </dgm:linClrLst>
+    <dgm:effectClrLst/>
+    <dgm:txLinClrLst/>
+    <dgm:txFillClrLst/>
+    <dgm:txEffectClrLst/>
+  </dgm:styleLbl>
+  <dgm:styleLbl name="node1">
+    <dgm:fillClrLst meth="repeat">
+      <a:schemeClr val="accent1"/>
+    </dgm:fillClrLst>
+    <dgm:linClrLst meth="repeat">
+      <a:schemeClr val="lt1"/>
+    </dgm:linClrLst>
+    <dgm:effectClrLst/>
+    <dgm:txLinClrLst/>
+    <dgm:txFillClrLst/>
+    <dgm:txEffectClrLst/>
+  </dgm:styleLbl>
+  <dgm:styleLbl name="lnNode1">
+    <dgm:fillClrLst meth="repeat">
+      <a:schemeClr val="accent1"/>
+    </dgm:fillClrLst>
+    <dgm:linClrLst meth="repeat">
+      <a:schemeClr val="lt1"/>
+    </dgm:linClrLst>
+    <dgm:effectClrLst/>
+    <dgm:txLinClrLst/>
+    <dgm:txFillClrLst/>
+    <dgm:txEffectClrLst/>
+  </dgm:styleLbl>
+  <dgm:styleLbl name="vennNode1">
+    <dgm:fillClrLst meth="repeat">
+      <a:schemeClr val="accent1">
+        <a:alpha val="50000"/>
+      </a:schemeClr>
+    </dgm:fillClrLst>
+    <dgm:linClrLst meth="repeat">
+      <a:schemeClr val="lt1"/>
+    </dgm:linClrLst>
+    <dgm:effectClrLst/>
+    <dgm:txLinClrLst/>
+    <dgm:txFillClrLst/>
+    <dgm:txEffectClrLst/>
+  </dgm:styleLbl>
+  <dgm:styleLbl name="node2">
+    <dgm:fillClrLst meth="repeat">
+      <a:schemeClr val="accent1"/>
+    </dgm:fillClrLst>
+    <dgm:linClrLst meth="repeat">
+      <a:schemeClr val="lt1"/>
+    </dgm:linClrLst>
+    <dgm:effectClrLst/>
+    <dgm:txLinClrLst/>
+    <dgm:txFillClrLst/>
+    <dgm:txEffectClrLst/>
+  </dgm:styleLbl>
+  <dgm:styleLbl name="node3">
+    <dgm:fillClrLst meth="repeat">
+      <a:schemeClr val="accent1"/>
+    </dgm:fillClrLst>
+    <dgm:linClrLst meth="repeat">
+      <a:schemeClr val="lt1"/>
+    </dgm:linClrLst>
+    <dgm:effectClrLst/>
+    <dgm:txLinClrLst/>
+    <dgm:txFillClrLst/>
+    <dgm:txEffectClrLst/>
+  </dgm:styleLbl>
+  <dgm:styleLbl name="node4">
+    <dgm:fillClrLst meth="repeat">
+      <a:schemeClr val="accent1"/>
+    </dgm:fillClrLst>
+    <dgm:linClrLst meth="repeat">
+      <a:schemeClr val="lt1"/>
+    </dgm:linClrLst>
+    <dgm:effectClrLst/>
+    <dgm:txLinClrLst/>
+    <dgm:txFillClrLst/>
+    <dgm:txEffectClrLst/>
+  </dgm:styleLbl>
+  <dgm:styleLbl name="fgImgPlace1">
+    <dgm:fillClrLst meth="repeat">
+      <a:schemeClr val="accent1">
+        <a:tint val="50000"/>
+      </a:schemeClr>
+    </dgm:fillClrLst>
+    <dgm:linClrLst meth="repeat">
+      <a:schemeClr val="lt1"/>
+    </dgm:linClrLst>
+    <dgm:effectClrLst/>
+    <dgm:txLinClrLst/>
+    <dgm:txFillClrLst meth="repeat">
+      <a:schemeClr val="lt1"/>
+    </dgm:txFillClrLst>
+    <dgm:txEffectClrLst/>
+  </dgm:styleLbl>
+  <dgm:styleLbl name="alignImgPlace1">
+    <dgm:fillClrLst meth="repeat">
+      <a:schemeClr val="accent1">
+        <a:tint val="50000"/>
+      </a:schemeClr>
+    </dgm:fillClrLst>
+    <dgm:linClrLst meth="repeat">
+      <a:schemeClr val="lt1"/>
+    </dgm:linClrLst>
+    <dgm:effectClrLst/>
+    <dgm:txLinClrLst/>
+    <dgm:txFillClrLst meth="repeat">
+      <a:schemeClr val="lt1"/>
+    </dgm:txFillClrLst>
+    <dgm:txEffectClrLst/>
+  </dgm:styleLbl>
+  <dgm:styleLbl name="bgImgPlace1">
+    <dgm:fillClrLst meth="repeat">
+      <a:schemeClr val="accent1">
+        <a:tint val="50000"/>
+      </a:schemeClr>
+    </dgm:fillClrLst>
+    <dgm:linClrLst meth="repeat">
+      <a:schemeClr val="lt1"/>
+    </dgm:linClrLst>
+    <dgm:effectClrLst/>
+    <dgm:txLinClrLst/>
+    <dgm:txFillClrLst meth="repeat">
+      <a:schemeClr val="lt1"/>
+    </dgm:txFillClrLst>
+    <dgm:txEffectClrLst/>
+  </dgm:styleLbl>
+  <dgm:styleLbl name="sibTrans2D1">
+    <dgm:fillClrLst meth="repeat">
+      <a:schemeClr val="accent1">
+        <a:tint val="60000"/>
+      </a:schemeClr>
+    </dgm:fillClrLst>
+    <dgm:linClrLst meth="repeat">
+      <a:schemeClr val="accent1">
+        <a:tint val="60000"/>
+      </a:schemeClr>
+    </dgm:linClrLst>
+    <dgm:effectClrLst/>
+    <dgm:txLinClrLst/>
+    <dgm:txFillClrLst/>
+    <dgm:txEffectClrLst/>
+  </dgm:styleLbl>
+  <dgm:styleLbl name="fgSibTrans2D1">
+    <dgm:fillClrLst meth="repeat">
+      <a:schemeClr val="accent1">
+        <a:tint val="60000"/>
+      </a:schemeClr>
+    </dgm:fillClrLst>
+    <dgm:linClrLst meth="repeat">
+      <a:schemeClr val="accent1">
+        <a:tint val="60000"/>
+      </a:schemeClr>
+    </dgm:linClrLst>
+    <dgm:effectClrLst/>
+    <dgm:txLinClrLst/>
+    <dgm:txFillClrLst/>
+    <dgm:txEffectClrLst/>
+  </dgm:styleLbl>
+  <dgm:styleLbl name="bgSibTrans2D1">
+    <dgm:fillClrLst meth="repeat">
+      <a:schemeClr val="accent1">
+        <a:tint val="60000"/>
+      </a:schemeClr>
+    </dgm:fillClrLst>
+    <dgm:linClrLst meth="repeat">
+      <a:schemeClr val="accent1">
+        <a:tint val="60000"/>
+      </a:schemeClr>
+    </dgm:linClrLst>
+    <dgm:effectClrLst/>
+    <dgm:txLinClrLst/>
+    <dgm:txFillClrLst/>
+    <dgm:txEffectClrLst/>
+  </dgm:styleLbl>
+  <dgm:styleLbl name="sibTrans1D1">
+    <dgm:fillClrLst meth="repeat">
+      <a:schemeClr val="accent1"/>
+    </dgm:fillClrLst>
+    <dgm:linClrLst meth="repeat">
+      <a:schemeClr val="accent1"/>
+    </dgm:linClrLst>
+    <dgm:effectClrLst/>
+    <dgm:txLinClrLst/>
+    <dgm:txFillClrLst meth="repeat">
+      <a:schemeClr val="tx1"/>
+    </dgm:txFillClrLst>
+    <dgm:txEffectClrLst/>
+  </dgm:styleLbl>
+  <dgm:styleLbl name="callout">
+    <dgm:fillClrLst meth="repeat">
+      <a:schemeClr val="accent1"/>
+    </dgm:fillClrLst>
+    <dgm:linClrLst meth="repeat">
+      <a:schemeClr val="accent1">
+        <a:tint val="50000"/>
+      </a:schemeClr>
+    </dgm:linClrLst>
+    <dgm:effectClrLst/>
+    <dgm:txLinClrLst/>
+    <dgm:txFillClrLst meth="repeat">
+      <a:schemeClr val="tx1"/>
+    </dgm:txFillClrLst>
+    <dgm:txEffectClrLst/>
+  </dgm:styleLbl>
+  <dgm:styleLbl name="asst0">
+    <dgm:fillClrLst meth="repeat">
+      <a:schemeClr val="accent1"/>
+    </dgm:fillClrLst>
+    <dgm:linClrLst meth="repeat">
+      <a:schemeClr val="lt1"/>
+    </dgm:linClrLst>
+    <dgm:effectClrLst/>
+    <dgm:txLinClrLst/>
+    <dgm:txFillClrLst/>
+    <dgm:txEffectClrLst/>
+  </dgm:styleLbl>
+  <dgm:styleLbl name="asst1">
+    <dgm:fillClrLst meth="repeat">
+      <a:schemeClr val="accent1"/>
+    </dgm:fillClrLst>
+    <dgm:linClrLst meth="repeat">
+      <a:schemeClr val="lt1"/>
+    </dgm:linClrLst>
+    <dgm:effectClrLst/>
+    <dgm:txLinClrLst/>
+    <dgm:txFillClrLst/>
+    <dgm:txEffectClrLst/>
+  </dgm:styleLbl>
+  <dgm:styleLbl name="asst2">
+    <dgm:fillClrLst meth="repeat">
+      <a:schemeClr val="accent1"/>
+    </dgm:fillClrLst>
+    <dgm:linClrLst meth="repeat">
+      <a:schemeClr val="lt1"/>
+    </dgm:linClrLst>
+    <dgm:effectClrLst/>
+    <dgm:txLinClrLst/>
+    <dgm:txFillClrLst/>
+    <dgm:txEffectClrLst/>
+  </dgm:styleLbl>
+  <dgm:styleLbl name="asst3">
+    <dgm:fillClrLst meth="repeat">
+      <a:schemeClr val="accent1"/>
+    </dgm:fillClrLst>
+    <dgm:linClrLst meth="repeat">
+      <a:schemeClr val="lt1"/>
+    </dgm:linClrLst>
+    <dgm:effectClrLst/>
+    <dgm:txLinClrLst/>
+    <dgm:txFillClrLst/>
+    <dgm:txEffectClrLst/>
+  </dgm:styleLbl>
+  <dgm:styleLbl name="asst4">
+    <dgm:fillClrLst meth="repeat">
+      <a:schemeClr val="accent1"/>
+    </dgm:fillClrLst>
+    <dgm:linClrLst meth="repeat">
+      <a:schemeClr val="lt1"/>
+    </dgm:linClrLst>
+    <dgm:effectClrLst/>
+    <dgm:txLinClrLst/>
+    <dgm:txFillClrLst/>
+    <dgm:txEffectClrLst/>
+  </dgm:styleLbl>
+  <dgm:styleLbl name="parChTrans2D1">
+    <dgm:fillClrLst meth="repeat">
+      <a:schemeClr val="accent1">
+        <a:tint val="60000"/>
+      </a:schemeClr>
+    </dgm:fillClrLst>
+    <dgm:linClrLst meth="repeat">
+      <a:schemeClr val="accent1">
+        <a:tint val="60000"/>
+      </a:schemeClr>
+    </dgm:linClrLst>
+    <dgm:effectClrLst/>
+    <dgm:txLinClrLst/>
+    <dgm:txFillClrLst meth="repeat">
+      <a:schemeClr val="lt1"/>
+    </dgm:txFillClrLst>
+    <dgm:txEffectClrLst/>
+  </dgm:styleLbl>
+  <dgm:styleLbl name="parChTrans2D2">
+    <dgm:fillClrLst meth="repeat">
+      <a:schemeClr val="accent1"/>
+    </dgm:fillClrLst>
+    <dgm:linClrLst meth="repeat">
+      <a:schemeClr val="accent1"/>
+    </dgm:linClrLst>
+    <dgm:effectClrLst/>
+    <dgm:txLinClrLst/>
+    <dgm:txFillClrLst meth="repeat">
+      <a:schemeClr val="lt1"/>
+    </dgm:txFillClrLst>
+    <dgm:txEffectClrLst/>
+  </dgm:styleLbl>
+  <dgm:styleLbl name="parChTrans2D3">
+    <dgm:fillClrLst meth="repeat">
+      <a:schemeClr val="accent1"/>
+    </dgm:fillClrLst>
+    <dgm:linClrLst meth="repeat">
+      <a:schemeClr val="accent1"/>
+    </dgm:linClrLst>
+    <dgm:effectClrLst/>
+    <dgm:txLinClrLst/>
+    <dgm:txFillClrLst meth="repeat">
+      <a:schemeClr val="lt1"/>
+    </dgm:txFillClrLst>
+    <dgm:txEffectClrLst/>
+  </dgm:styleLbl>
+  <dgm:styleLbl name="parChTrans2D4">
+    <dgm:fillClrLst meth="repeat">
+      <a:schemeClr val="accent1"/>
+    </dgm:fillClrLst>
+    <dgm:linClrLst meth="repeat">
+      <a:schemeClr val="accent1"/>
+    </dgm:linClrLst>
+    <dgm:effectClrLst/>
+    <dgm:txLinClrLst/>
+    <dgm:txFillClrLst meth="repeat">
+      <a:schemeClr val="lt1"/>
+    </dgm:txFillClrLst>
+    <dgm:txEffectClrLst/>
+  </dgm:styleLbl>
+  <dgm:styleLbl name="parChTrans1D1">
+    <dgm:fillClrLst meth="repeat">
+      <a:schemeClr val="accent1"/>
+    </dgm:fillClrLst>
+    <dgm:linClrLst meth="repeat">
+      <a:schemeClr val="accent1">
+        <a:shade val="60000"/>
+      </a:schemeClr>
+    </dgm:linClrLst>
+    <dgm:effectClrLst/>
+    <dgm:txLinClrLst/>
+    <dgm:txFillClrLst meth="repeat">
+      <a:schemeClr val="tx1"/>
+    </dgm:txFillClrLst>
+    <dgm:txEffectClrLst/>
+  </dgm:styleLbl>
+  <dgm:styleLbl name="parChTrans1D2">
+    <dgm:fillClrLst meth="repeat">
+      <a:schemeClr val="accent1"/>
+    </dgm:fillClrLst>
+    <dgm:linClrLst meth="repeat">
+      <a:schemeClr val="accent1">
+        <a:shade val="60000"/>
+      </a:schemeClr>
+    </dgm:linClrLst>
+    <dgm:effectClrLst/>
+    <dgm:txLinClrLst/>
+    <dgm:txFillClrLst meth="repeat">
+      <a:schemeClr val="tx1"/>
+    </dgm:txFillClrLst>
+    <dgm:txEffectClrLst/>
+  </dgm:styleLbl>
+  <dgm:styleLbl name="parChTrans1D3">
+    <dgm:fillClrLst meth="repeat">
+      <a:schemeClr val="accent1"/>
+    </dgm:fillClrLst>
+    <dgm:linClrLst meth="repeat">
+      <a:schemeClr val="accent1">
+        <a:shade val="80000"/>
+      </a:schemeClr>
+    </dgm:linClrLst>
+    <dgm:effectClrLst/>
+    <dgm:txLinClrLst/>
+    <dgm:txFillClrLst meth="repeat">
+      <a:schemeClr val="tx1"/>
+    </dgm:txFillClrLst>
+    <dgm:txEffectClrLst/>
+  </dgm:styleLbl>
+  <dgm:styleLbl name="parChTrans1D4">
+    <dgm:fillClrLst meth="repeat">
+      <a:schemeClr val="accent1"/>
+    </dgm:fillClrLst>
+    <dgm:linClrLst meth="repeat">
+      <a:schemeClr val="accent1">
+        <a:shade val="80000"/>
+      </a:schemeClr>
+    </dgm:linClrLst>
+    <dgm:effectClrLst/>
+    <dgm:txLinClrLst/>
+    <dgm:txFillClrLst meth="repeat">
+      <a:schemeClr val="tx1"/>
+    </dgm:txFillClrLst>
+    <dgm:txEffectClrLst/>
+  </dgm:styleLbl>
+  <dgm:styleLbl name="fgAcc1">
+    <dgm:fillClrLst meth="repeat">
+      <a:schemeClr val="lt1">
+        <a:alpha val="90000"/>
+      </a:schemeClr>
+    </dgm:fillClrLst>
+    <dgm:linClrLst meth="repeat">
+      <a:schemeClr val="accent1"/>
+    </dgm:linClrLst>
+    <dgm:effectClrLst/>
+    <dgm:txLinClrLst/>
+    <dgm:txFillClrLst meth="repeat">
+      <a:schemeClr val="dk1"/>
+    </dgm:txFillClrLst>
+    <dgm:txEffectClrLst/>
+  </dgm:styleLbl>
+  <dgm:styleLbl name="conFgAcc1">
+    <dgm:fillClrLst meth="repeat">
+      <a:schemeClr val="lt1">
+        <a:alpha val="90000"/>
+      </a:schemeClr>
+    </dgm:fillClrLst>
+    <dgm:linClrLst meth="repeat">
+      <a:schemeClr val="accent1"/>
+    </dgm:linClrLst>
+    <dgm:effectClrLst/>
+    <dgm:txLinClrLst/>
+    <dgm:txFillClrLst meth="repeat">
+      <a:schemeClr val="dk1"/>
+    </dgm:txFillClrLst>
+    <dgm:txEffectClrLst/>
+  </dgm:styleLbl>
+  <dgm:styleLbl name="alignAcc1">
+    <dgm:fillClrLst meth="repeat">
+      <a:schemeClr val="lt1">
+        <a:alpha val="90000"/>
+      </a:schemeClr>
+    </dgm:fillClrLst>
+    <dgm:linClrLst meth="repeat">
+      <a:schemeClr val="accent1"/>
+    </dgm:linClrLst>
+    <dgm:effectClrLst/>
+    <dgm:txLinClrLst/>
+    <dgm:txFillClrLst meth="repeat">
+      <a:schemeClr val="dk1"/>
+    </dgm:txFillClrLst>
+    <dgm:txEffectClrLst/>
+  </dgm:styleLbl>
+  <dgm:styleLbl name="trAlignAcc1">
+    <dgm:fillClrLst meth="repeat">
+      <a:schemeClr val="lt1">
+        <a:alpha val="40000"/>
+      </a:schemeClr>
+    </dgm:fillClrLst>
+    <dgm:linClrLst meth="repeat">
+      <a:schemeClr val="accent1"/>
+    </dgm:linClrLst>
+    <dgm:effectClrLst/>
+    <dgm:txLinClrLst/>
+    <dgm:txFillClrLst meth="repeat">
+      <a:schemeClr val="dk1"/>
+    </dgm:txFillClrLst>
+    <dgm:txEffectClrLst/>
+  </dgm:styleLbl>
+  <dgm:styleLbl name="bgAcc1">
+    <dgm:fillClrLst meth="repeat">
+      <a:schemeClr val="lt1">
+        <a:alpha val="90000"/>
+      </a:schemeClr>
+    </dgm:fillClrLst>
+    <dgm:linClrLst meth="repeat">
+      <a:schemeClr val="accent1"/>
+    </dgm:linClrLst>
+    <dgm:effectClrLst/>
+    <dgm:txLinClrLst/>
+    <dgm:txFillClrLst meth="repeat">
+      <a:schemeClr val="dk1"/>
+    </dgm:txFillClrLst>
+    <dgm:txEffectClrLst/>
+  </dgm:styleLbl>
+  <dgm:styleLbl name="solidFgAcc1">
+    <dgm:fillClrLst meth="repeat">
+      <a:schemeClr val="lt1"/>
+    </dgm:fillClrLst>
+    <dgm:linClrLst meth="repeat">
+      <a:schemeClr val="accent1"/>
+    </dgm:linClrLst>
+    <dgm:effectClrLst/>
+    <dgm:txLinClrLst/>
+    <dgm:txFillClrLst meth="repeat">
+      <a:schemeClr val="dk1"/>
+    </dgm:txFillClrLst>
+    <dgm:txEffectClrLst/>
+  </dgm:styleLbl>
+  <dgm:styleLbl name="solidAlignAcc1">
+    <dgm:fillClrLst meth="repeat">
+      <a:schemeClr val="lt1"/>
+    </dgm:fillClrLst>
+    <dgm:linClrLst meth="repeat">
+      <a:schemeClr val="accent1"/>
+    </dgm:linClrLst>
+    <dgm:effectClrLst/>
+    <dgm:txLinClrLst/>
+    <dgm:txFillClrLst meth="repeat">
+      <a:schemeClr val="dk1"/>
+    </dgm:txFillClrLst>
+    <dgm:txEffectClrLst/>
+  </dgm:styleLbl>
+  <dgm:styleLbl name="solidBgAcc1">
+    <dgm:fillClrLst meth="repeat">
+      <a:schemeClr val="lt1"/>
+    </dgm:fillClrLst>
+    <dgm:linClrLst meth="repeat">
+      <a:schemeClr val="accent1"/>
+    </dgm:linClrLst>
+    <dgm:effectClrLst/>
+    <dgm:txLinClrLst/>
+    <dgm:txFillClrLst meth="repeat">
+      <a:schemeClr val="dk1"/>
+    </dgm:txFillClrLst>
+    <dgm:txEffectClrLst/>
+  </dgm:styleLbl>
+  <dgm:styleLbl name="fgAccFollowNode1">
+    <dgm:fillClrLst meth="repeat">
+      <a:schemeClr val="accent1">
+        <a:alpha val="90000"/>
+        <a:tint val="40000"/>
+      </a:schemeClr>
+    </dgm:fillClrLst>
+    <dgm:linClrLst meth="repeat">
+      <a:schemeClr val="accent1">
+        <a:alpha val="90000"/>
+        <a:tint val="40000"/>
+      </a:schemeClr>
+    </dgm:linClrLst>
+    <dgm:effectClrLst/>
+    <dgm:txLinClrLst/>
+    <dgm:txFillClrLst meth="repeat">
+      <a:schemeClr val="dk1"/>
+    </dgm:txFillClrLst>
+    <dgm:txEffectClrLst/>
+  </dgm:styleLbl>
+  <dgm:styleLbl name="alignAccFollowNode1">
+    <dgm:fillClrLst meth="repeat">
+      <a:schemeClr val="accent1">
+        <a:alpha val="90000"/>
+        <a:tint val="40000"/>
+      </a:schemeClr>
+    </dgm:fillClrLst>
+    <dgm:linClrLst meth="repeat">
+      <a:schemeClr val="accent1">
+        <a:alpha val="90000"/>
+        <a:tint val="40000"/>
+      </a:schemeClr>
+    </dgm:linClrLst>
+    <dgm:effectClrLst/>
+    <dgm:txLinClrLst/>
+    <dgm:txFillClrLst meth="repeat">
+      <a:schemeClr val="dk1"/>
+    </dgm:txFillClrLst>
+    <dgm:txEffectClrLst/>
+  </dgm:styleLbl>
+  <dgm:styleLbl name="bgAccFollowNode1">
+    <dgm:fillClrLst meth="repeat">
+      <a:schemeClr val="accent1">
+        <a:alpha val="90000"/>
+        <a:tint val="40000"/>
+      </a:schemeClr>
+    </dgm:fillClrLst>
+    <dgm:linClrLst meth="repeat">
+      <a:schemeClr val="accent1">
+        <a:alpha val="90000"/>
+        <a:tint val="40000"/>
+      </a:schemeClr>
+    </dgm:linClrLst>
+    <dgm:effectClrLst/>
+    <dgm:txLinClrLst/>
+    <dgm:txFillClrLst meth="repeat">
+      <a:schemeClr val="dk1"/>
+    </dgm:txFillClrLst>
+    <dgm:txEffectClrLst/>
+  </dgm:styleLbl>
+  <dgm:styleLbl name="fgAcc0">
+    <dgm:fillClrLst meth="repeat">
+      <a:schemeClr val="lt1">
+        <a:alpha val="90000"/>
+      </a:schemeClr>
+    </dgm:fillClrLst>
+    <dgm:linClrLst meth="repeat">
+      <a:schemeClr val="accent1"/>
+    </dgm:linClrLst>
+    <dgm:effectClrLst/>
+    <dgm:txLinClrLst/>
+    <dgm:txFillClrLst meth="repeat">
+      <a:schemeClr val="dk1"/>
+    </dgm:txFillClrLst>
+    <dgm:txEffectClrLst/>
+  </dgm:styleLbl>
+  <dgm:styleLbl name="fgAcc2">
+    <dgm:fillClrLst meth="repeat">
+      <a:schemeClr val="lt1">
+        <a:alpha val="90000"/>
+      </a:schemeClr>
+    </dgm:fillClrLst>
+    <dgm:linClrLst meth="repeat">
+      <a:schemeClr val="accent1"/>
+    </dgm:linClrLst>
+    <dgm:effectClrLst/>
+    <dgm:txLinClrLst/>
+    <dgm:txFillClrLst meth="repeat">
+      <a:schemeClr val="dk1"/>
+    </dgm:txFillClrLst>
+    <dgm:txEffectClrLst/>
+  </dgm:styleLbl>
+  <dgm:styleLbl name="fgAcc3">
+    <dgm:fillClrLst meth="repeat">
+      <a:schemeClr val="lt1">
+        <a:alpha val="90000"/>
+      </a:schemeClr>
+    </dgm:fillClrLst>
+    <dgm:linClrLst meth="repeat">
+      <a:schemeClr val="accent1"/>
+    </dgm:linClrLst>
+    <dgm:effectClrLst/>
+    <dgm:txLinClrLst/>
+    <dgm:txFillClrLst meth="repeat">
+      <a:schemeClr val="dk1"/>
+    </dgm:txFillClrLst>
+    <dgm:txEffectClrLst/>
+  </dgm:styleLbl>
+  <dgm:styleLbl name="fgAcc4">
+    <dgm:fillClrLst meth="repeat">
+      <a:schemeClr val="lt1">
+        <a:alpha val="90000"/>
+      </a:schemeClr>
+    </dgm:fillClrLst>
+    <dgm:linClrLst meth="repeat">
+      <a:schemeClr val="accent1"/>
+    </dgm:linClrLst>
+    <dgm:effectClrLst/>
+    <dgm:txLinClrLst/>
+    <dgm:txFillClrLst meth="repeat">
+      <a:schemeClr val="dk1"/>
+    </dgm:txFillClrLst>
+    <dgm:txEffectClrLst/>
+  </dgm:styleLbl>
+  <dgm:styleLbl name="bgShp">
+    <dgm:fillClrLst meth="repeat">
+      <a:schemeClr val="accent1">
+        <a:tint val="40000"/>
+      </a:schemeClr>
+    </dgm:fillClrLst>
+    <dgm:linClrLst meth="repeat">
+      <a:schemeClr val="accent1"/>
+    </dgm:linClrLst>
+    <dgm:effectClrLst/>
+    <dgm:txLinClrLst/>
+    <dgm:txFillClrLst meth="repeat">
+      <a:schemeClr val="dk1"/>
+    </dgm:txFillClrLst>
+    <dgm:txEffectClrLst/>
+  </dgm:styleLbl>
+  <dgm:styleLbl name="dkBgShp">
+    <dgm:fillClrLst meth="repeat">
+      <a:schemeClr val="accent1">
+        <a:shade val="80000"/>
+      </a:schemeClr>
+    </dgm:fillClrLst>
+    <dgm:linClrLst meth="repeat">
+      <a:schemeClr val="accent1"/>
+    </dgm:linClrLst>
+    <dgm:effectClrLst/>
+    <dgm:txLinClrLst/>
+    <dgm:txFillClrLst meth="repeat">
+      <a:schemeClr val="lt1"/>
+    </dgm:txFillClrLst>
+    <dgm:txEffectClrLst/>
+  </dgm:styleLbl>
+  <dgm:styleLbl name="trBgShp">
+    <dgm:fillClrLst meth="repeat">
+      <a:schemeClr val="accent1">
+        <a:tint val="50000"/>
+        <a:alpha val="40000"/>
+      </a:schemeClr>
+    </dgm:fillClrLst>
+    <dgm:linClrLst meth="repeat">
+      <a:schemeClr val="accent1"/>
+    </dgm:linClrLst>
+    <dgm:effectClrLst/>
+    <dgm:txLinClrLst/>
+    <dgm:txFillClrLst meth="repeat">
+      <a:schemeClr val="lt1"/>
+    </dgm:txFillClrLst>
+    <dgm:txEffectClrLst/>
+  </dgm:styleLbl>
+  <dgm:styleLbl name="fgShp">
+    <dgm:fillClrLst meth="repeat">
+      <a:schemeClr val="accent1">
+        <a:tint val="60000"/>
+      </a:schemeClr>
+    </dgm:fillClrLst>
+    <dgm:linClrLst meth="repeat">
+      <a:schemeClr val="lt1"/>
+    </dgm:linClrLst>
+    <dgm:effectClrLst/>
+    <dgm:txLinClrLst/>
+    <dgm:txFillClrLst meth="repeat">
+      <a:schemeClr val="dk1"/>
+    </dgm:txFillClrLst>
+    <dgm:txEffectClrLst/>
+  </dgm:styleLbl>
+  <dgm:styleLbl name="revTx">
+    <dgm:fillClrLst meth="repeat">
+      <a:schemeClr val="lt1">
+        <a:alpha val="0"/>
+      </a:schemeClr>
+    </dgm:fillClrLst>
+    <dgm:linClrLst meth="repeat">
+      <a:schemeClr val="dk1">
+        <a:alpha val="0"/>
+      </a:schemeClr>
+    </dgm:linClrLst>
+    <dgm:effectClrLst/>
+    <dgm:txLinClrLst/>
+    <dgm:txFillClrLst meth="repeat">
+      <a:schemeClr val="tx1"/>
+    </dgm:txFillClrLst>
+    <dgm:txEffectClrLst/>
+  </dgm:styleLbl>
+</dgm:colorsDef>
+</file>
+
+<file path=ppt/diagrams/data1.xml><?xml version="1.0" encoding="utf-8"?>
+<dgm:dataModel xmlns:dgm="http://schemas.openxmlformats.org/drawingml/2006/diagram" xmlns:a="http://schemas.openxmlformats.org/drawingml/2006/main">
+  <dgm:ptLst>
+    <dgm:pt modelId="{E7A42328-C8A7-1642-8C57-57EECDDE5F28}" type="doc">
+      <dgm:prSet loTypeId="urn:microsoft.com/office/officeart/2005/8/layout/default" loCatId="" qsTypeId="urn:microsoft.com/office/officeart/2005/8/quickstyle/simple1" qsCatId="simple" csTypeId="urn:microsoft.com/office/officeart/2005/8/colors/accent1_2" csCatId="accent1" phldr="1"/>
+      <dgm:spPr/>
+      <dgm:t>
+        <a:bodyPr/>
+        <a:lstStyle/>
+        <a:p>
+          <a:endParaRPr lang="zh-CN" altLang="en-US"/>
+        </a:p>
+      </dgm:t>
+    </dgm:pt>
+    <dgm:pt modelId="{E06044C0-99C0-BE40-B29E-3CE723750EDE}">
+      <dgm:prSet phldrT="[文本]"/>
+      <dgm:spPr/>
+      <dgm:t>
+        <a:bodyPr/>
+        <a:lstStyle/>
+        <a:p>
+          <a:r>
+            <a:rPr lang="zh-CN" altLang="en-US" dirty="0"/>
+            <a:t>石灰石</a:t>
+          </a:r>
+        </a:p>
+      </dgm:t>
+    </dgm:pt>
+    <dgm:pt modelId="{090DAE46-6029-2A44-B3C2-396487725E71}" type="parTrans" cxnId="{26D59C78-BE2C-5B48-B233-7D2503FA8CDC}">
+      <dgm:prSet/>
+      <dgm:spPr/>
+      <dgm:t>
+        <a:bodyPr/>
+        <a:lstStyle/>
+        <a:p>
+          <a:endParaRPr lang="zh-CN" altLang="en-US"/>
+        </a:p>
+      </dgm:t>
+    </dgm:pt>
+    <dgm:pt modelId="{7F369D10-845A-6844-81CD-03E160C8E4B5}" type="sibTrans" cxnId="{26D59C78-BE2C-5B48-B233-7D2503FA8CDC}">
+      <dgm:prSet/>
+      <dgm:spPr/>
+      <dgm:t>
+        <a:bodyPr/>
+        <a:lstStyle/>
+        <a:p>
+          <a:endParaRPr lang="zh-CN" altLang="en-US"/>
+        </a:p>
+      </dgm:t>
+    </dgm:pt>
+    <dgm:pt modelId="{6FE18750-DBEB-8D4E-BAAE-6A44B5C1B048}">
+      <dgm:prSet phldrT="[文本]"/>
+      <dgm:spPr/>
+      <dgm:t>
+        <a:bodyPr/>
+        <a:lstStyle/>
+        <a:p>
+          <a:r>
+            <a:rPr lang="zh-CN" altLang="en-US" dirty="0"/>
+            <a:t>粘土</a:t>
+          </a:r>
+        </a:p>
+      </dgm:t>
+    </dgm:pt>
+    <dgm:pt modelId="{794BE2DE-7569-DF4C-98A9-11B1128D0836}" type="parTrans" cxnId="{15C44EE6-745D-7B42-8B63-5191E08BAC7A}">
+      <dgm:prSet/>
+      <dgm:spPr/>
+      <dgm:t>
+        <a:bodyPr/>
+        <a:lstStyle/>
+        <a:p>
+          <a:endParaRPr lang="zh-CN" altLang="en-US"/>
+        </a:p>
+      </dgm:t>
+    </dgm:pt>
+    <dgm:pt modelId="{6BD19441-768A-FE45-BACE-C85663ADBA7E}" type="sibTrans" cxnId="{15C44EE6-745D-7B42-8B63-5191E08BAC7A}">
+      <dgm:prSet/>
+      <dgm:spPr/>
+      <dgm:t>
+        <a:bodyPr/>
+        <a:lstStyle/>
+        <a:p>
+          <a:endParaRPr lang="zh-CN" altLang="en-US"/>
+        </a:p>
+      </dgm:t>
+    </dgm:pt>
+    <dgm:pt modelId="{7383A8F1-F4BE-214C-A190-45C00441E7A3}">
+      <dgm:prSet phldrT="[文本]"/>
+      <dgm:spPr/>
+      <dgm:t>
+        <a:bodyPr/>
+        <a:lstStyle/>
+        <a:p>
+          <a:r>
+            <a:rPr lang="zh-CN" altLang="en-US" dirty="0"/>
+            <a:t>铁粉</a:t>
+          </a:r>
+        </a:p>
+      </dgm:t>
+    </dgm:pt>
+    <dgm:pt modelId="{C2F4280B-4848-F34B-9C4C-B0824B561252}" type="parTrans" cxnId="{F3B2CC8A-5B46-DD45-87FC-40858CC3A2E4}">
+      <dgm:prSet/>
+      <dgm:spPr/>
+      <dgm:t>
+        <a:bodyPr/>
+        <a:lstStyle/>
+        <a:p>
+          <a:endParaRPr lang="zh-CN" altLang="en-US"/>
+        </a:p>
+      </dgm:t>
+    </dgm:pt>
+    <dgm:pt modelId="{9D5D5E70-BA78-ED41-9E10-6D9ED8664591}" type="sibTrans" cxnId="{F3B2CC8A-5B46-DD45-87FC-40858CC3A2E4}">
+      <dgm:prSet/>
+      <dgm:spPr/>
+      <dgm:t>
+        <a:bodyPr/>
+        <a:lstStyle/>
+        <a:p>
+          <a:endParaRPr lang="zh-CN" altLang="en-US"/>
+        </a:p>
+      </dgm:t>
+    </dgm:pt>
+    <dgm:pt modelId="{C5A0C272-FB1C-0741-A7A7-10D4E78D84AC}" type="pres">
+      <dgm:prSet presAssocID="{E7A42328-C8A7-1642-8C57-57EECDDE5F28}" presName="diagram" presStyleCnt="0">
+        <dgm:presLayoutVars>
+          <dgm:dir/>
+          <dgm:resizeHandles val="exact"/>
+        </dgm:presLayoutVars>
+      </dgm:prSet>
+      <dgm:spPr/>
+    </dgm:pt>
+    <dgm:pt modelId="{757C6949-5E6A-9749-9703-E9E6DC764364}" type="pres">
+      <dgm:prSet presAssocID="{E06044C0-99C0-BE40-B29E-3CE723750EDE}" presName="node" presStyleLbl="node1" presStyleIdx="0" presStyleCnt="3">
+        <dgm:presLayoutVars>
+          <dgm:bulletEnabled val="1"/>
+        </dgm:presLayoutVars>
+      </dgm:prSet>
+      <dgm:spPr/>
+    </dgm:pt>
+    <dgm:pt modelId="{6EEBC5E7-CF45-6243-A817-7A6689E0B015}" type="pres">
+      <dgm:prSet presAssocID="{7F369D10-845A-6844-81CD-03E160C8E4B5}" presName="sibTrans" presStyleCnt="0"/>
+      <dgm:spPr/>
+    </dgm:pt>
+    <dgm:pt modelId="{1734F326-A5A2-EE4C-BBEE-7FD2853C4D11}" type="pres">
+      <dgm:prSet presAssocID="{6FE18750-DBEB-8D4E-BAAE-6A44B5C1B048}" presName="node" presStyleLbl="node1" presStyleIdx="1" presStyleCnt="3">
+        <dgm:presLayoutVars>
+          <dgm:bulletEnabled val="1"/>
+        </dgm:presLayoutVars>
+      </dgm:prSet>
+      <dgm:spPr/>
+    </dgm:pt>
+    <dgm:pt modelId="{91555933-DC80-7048-8B45-914C75BA12C4}" type="pres">
+      <dgm:prSet presAssocID="{6BD19441-768A-FE45-BACE-C85663ADBA7E}" presName="sibTrans" presStyleCnt="0"/>
+      <dgm:spPr/>
+    </dgm:pt>
+    <dgm:pt modelId="{3DE84D8B-091B-844D-8D08-F42F60078744}" type="pres">
+      <dgm:prSet presAssocID="{7383A8F1-F4BE-214C-A190-45C00441E7A3}" presName="node" presStyleLbl="node1" presStyleIdx="2" presStyleCnt="3">
+        <dgm:presLayoutVars>
+          <dgm:bulletEnabled val="1"/>
+        </dgm:presLayoutVars>
+      </dgm:prSet>
+      <dgm:spPr/>
+    </dgm:pt>
+  </dgm:ptLst>
+  <dgm:cxnLst>
+    <dgm:cxn modelId="{8FCDA60E-EDA1-C843-9E52-FDCDB4215627}" type="presOf" srcId="{E06044C0-99C0-BE40-B29E-3CE723750EDE}" destId="{757C6949-5E6A-9749-9703-E9E6DC764364}" srcOrd="0" destOrd="0" presId="urn:microsoft.com/office/officeart/2005/8/layout/default"/>
+    <dgm:cxn modelId="{BA647239-936E-2E44-A9C8-52E8CDB0BED2}" type="presOf" srcId="{E7A42328-C8A7-1642-8C57-57EECDDE5F28}" destId="{C5A0C272-FB1C-0741-A7A7-10D4E78D84AC}" srcOrd="0" destOrd="0" presId="urn:microsoft.com/office/officeart/2005/8/layout/default"/>
+    <dgm:cxn modelId="{F9C3B540-642B-3C49-942D-3EF2C84CA380}" type="presOf" srcId="{6FE18750-DBEB-8D4E-BAAE-6A44B5C1B048}" destId="{1734F326-A5A2-EE4C-BBEE-7FD2853C4D11}" srcOrd="0" destOrd="0" presId="urn:microsoft.com/office/officeart/2005/8/layout/default"/>
+    <dgm:cxn modelId="{26D59C78-BE2C-5B48-B233-7D2503FA8CDC}" srcId="{E7A42328-C8A7-1642-8C57-57EECDDE5F28}" destId="{E06044C0-99C0-BE40-B29E-3CE723750EDE}" srcOrd="0" destOrd="0" parTransId="{090DAE46-6029-2A44-B3C2-396487725E71}" sibTransId="{7F369D10-845A-6844-81CD-03E160C8E4B5}"/>
+    <dgm:cxn modelId="{F3B2CC8A-5B46-DD45-87FC-40858CC3A2E4}" srcId="{E7A42328-C8A7-1642-8C57-57EECDDE5F28}" destId="{7383A8F1-F4BE-214C-A190-45C00441E7A3}" srcOrd="2" destOrd="0" parTransId="{C2F4280B-4848-F34B-9C4C-B0824B561252}" sibTransId="{9D5D5E70-BA78-ED41-9E10-6D9ED8664591}"/>
+    <dgm:cxn modelId="{15C44EE6-745D-7B42-8B63-5191E08BAC7A}" srcId="{E7A42328-C8A7-1642-8C57-57EECDDE5F28}" destId="{6FE18750-DBEB-8D4E-BAAE-6A44B5C1B048}" srcOrd="1" destOrd="0" parTransId="{794BE2DE-7569-DF4C-98A9-11B1128D0836}" sibTransId="{6BD19441-768A-FE45-BACE-C85663ADBA7E}"/>
+    <dgm:cxn modelId="{EC87A4F7-FB99-4A47-88DD-3D973690538A}" type="presOf" srcId="{7383A8F1-F4BE-214C-A190-45C00441E7A3}" destId="{3DE84D8B-091B-844D-8D08-F42F60078744}" srcOrd="0" destOrd="0" presId="urn:microsoft.com/office/officeart/2005/8/layout/default"/>
+    <dgm:cxn modelId="{B7A81081-0695-C94B-9621-A75935C43D61}" type="presParOf" srcId="{C5A0C272-FB1C-0741-A7A7-10D4E78D84AC}" destId="{757C6949-5E6A-9749-9703-E9E6DC764364}" srcOrd="0" destOrd="0" presId="urn:microsoft.com/office/officeart/2005/8/layout/default"/>
+    <dgm:cxn modelId="{4866FEC8-92FA-1A4B-AC09-CBD00B8C6E1D}" type="presParOf" srcId="{C5A0C272-FB1C-0741-A7A7-10D4E78D84AC}" destId="{6EEBC5E7-CF45-6243-A817-7A6689E0B015}" srcOrd="1" destOrd="0" presId="urn:microsoft.com/office/officeart/2005/8/layout/default"/>
+    <dgm:cxn modelId="{7F1C384A-D69C-B843-A674-014535E53C08}" type="presParOf" srcId="{C5A0C272-FB1C-0741-A7A7-10D4E78D84AC}" destId="{1734F326-A5A2-EE4C-BBEE-7FD2853C4D11}" srcOrd="2" destOrd="0" presId="urn:microsoft.com/office/officeart/2005/8/layout/default"/>
+    <dgm:cxn modelId="{2AB0C089-CBCF-2C45-A384-98352873A31D}" type="presParOf" srcId="{C5A0C272-FB1C-0741-A7A7-10D4E78D84AC}" destId="{91555933-DC80-7048-8B45-914C75BA12C4}" srcOrd="3" destOrd="0" presId="urn:microsoft.com/office/officeart/2005/8/layout/default"/>
+    <dgm:cxn modelId="{D4D1E913-A08E-0444-B233-428081FD5040}" type="presParOf" srcId="{C5A0C272-FB1C-0741-A7A7-10D4E78D84AC}" destId="{3DE84D8B-091B-844D-8D08-F42F60078744}" srcOrd="4" destOrd="0" presId="urn:microsoft.com/office/officeart/2005/8/layout/default"/>
+  </dgm:cxnLst>
+  <dgm:bg/>
+  <dgm:whole/>
+  <dgm:extLst>
+    <a:ext uri="http://schemas.microsoft.com/office/drawing/2008/diagram">
+      <dsp:dataModelExt xmlns:dsp="http://schemas.microsoft.com/office/drawing/2008/diagram" relId="rId6" minVer="http://schemas.openxmlformats.org/drawingml/2006/diagram"/>
+    </a:ext>
+  </dgm:extLst>
+</dgm:dataModel>
+</file>
+
+<file path=ppt/diagrams/drawing1.xml><?xml version="1.0" encoding="utf-8"?>
+<dsp:drawing xmlns:dgm="http://schemas.openxmlformats.org/drawingml/2006/diagram" xmlns:dsp="http://schemas.microsoft.com/office/drawing/2008/diagram" xmlns:a="http://schemas.openxmlformats.org/drawingml/2006/main">
+  <dsp:spTree>
+    <dsp:nvGrpSpPr>
+      <dsp:cNvPr id="0" name=""/>
+      <dsp:cNvGrpSpPr/>
+    </dsp:nvGrpSpPr>
+    <dsp:grpSpPr/>
+    <dsp:sp modelId="{757C6949-5E6A-9749-9703-E9E6DC764364}">
+      <dsp:nvSpPr>
+        <dsp:cNvPr id="0" name=""/>
+        <dsp:cNvSpPr/>
+      </dsp:nvSpPr>
+      <dsp:spPr>
+        <a:xfrm>
+          <a:off x="0" y="1131332"/>
+          <a:ext cx="845015" cy="507008"/>
+        </a:xfrm>
+        <a:prstGeom prst="rect">
+          <a:avLst/>
+        </a:prstGeom>
+        <a:solidFill>
+          <a:schemeClr val="accent1">
+            <a:hueOff val="0"/>
+            <a:satOff val="0"/>
+            <a:lumOff val="0"/>
+            <a:alphaOff val="0"/>
+          </a:schemeClr>
+        </a:solidFill>
+        <a:ln w="19050" cap="flat" cmpd="sng" algn="ctr">
+          <a:solidFill>
+            <a:schemeClr val="lt1">
+              <a:hueOff val="0"/>
+              <a:satOff val="0"/>
+              <a:lumOff val="0"/>
+              <a:alphaOff val="0"/>
+            </a:schemeClr>
+          </a:solidFill>
+          <a:prstDash val="solid"/>
+          <a:miter lim="800000"/>
+        </a:ln>
+        <a:effectLst/>
+      </dsp:spPr>
+      <dsp:style>
+        <a:lnRef idx="2">
+          <a:scrgbClr r="0" g="0" b="0"/>
+        </a:lnRef>
+        <a:fillRef idx="1">
+          <a:scrgbClr r="0" g="0" b="0"/>
+        </a:fillRef>
+        <a:effectRef idx="0">
+          <a:scrgbClr r="0" g="0" b="0"/>
+        </a:effectRef>
+        <a:fontRef idx="minor">
+          <a:schemeClr val="lt1"/>
+        </a:fontRef>
+      </dsp:style>
+      <dsp:txBody>
+        <a:bodyPr spcFirstLastPara="0" vert="horz" wrap="square" lIns="68580" tIns="68580" rIns="68580" bIns="68580" numCol="1" spcCol="1270" anchor="ctr" anchorCtr="0">
+          <a:noAutofit/>
+        </a:bodyPr>
+        <a:lstStyle/>
+        <a:p>
+          <a:pPr marL="0" lvl="0" indent="0" algn="ctr" defTabSz="800100">
+            <a:lnSpc>
+              <a:spcPct val="90000"/>
+            </a:lnSpc>
+            <a:spcBef>
+              <a:spcPct val="0"/>
+            </a:spcBef>
+            <a:spcAft>
+              <a:spcPct val="35000"/>
+            </a:spcAft>
+            <a:buNone/>
+          </a:pPr>
+          <a:r>
+            <a:rPr lang="zh-CN" altLang="en-US" sz="1800" kern="1200" dirty="0"/>
+            <a:t>石灰石</a:t>
+          </a:r>
+        </a:p>
+      </dsp:txBody>
+      <dsp:txXfrm>
+        <a:off x="0" y="1131332"/>
+        <a:ext cx="845015" cy="507008"/>
+      </dsp:txXfrm>
+    </dsp:sp>
+    <dsp:sp modelId="{1734F326-A5A2-EE4C-BBEE-7FD2853C4D11}">
+      <dsp:nvSpPr>
+        <dsp:cNvPr id="0" name=""/>
+        <dsp:cNvSpPr/>
+      </dsp:nvSpPr>
+      <dsp:spPr>
+        <a:xfrm>
+          <a:off x="0" y="1722843"/>
+          <a:ext cx="845015" cy="507008"/>
+        </a:xfrm>
+        <a:prstGeom prst="rect">
+          <a:avLst/>
+        </a:prstGeom>
+        <a:solidFill>
+          <a:schemeClr val="accent1">
+            <a:hueOff val="0"/>
+            <a:satOff val="0"/>
+            <a:lumOff val="0"/>
+            <a:alphaOff val="0"/>
+          </a:schemeClr>
+        </a:solidFill>
+        <a:ln w="19050" cap="flat" cmpd="sng" algn="ctr">
+          <a:solidFill>
+            <a:schemeClr val="lt1">
+              <a:hueOff val="0"/>
+              <a:satOff val="0"/>
+              <a:lumOff val="0"/>
+              <a:alphaOff val="0"/>
+            </a:schemeClr>
+          </a:solidFill>
+          <a:prstDash val="solid"/>
+          <a:miter lim="800000"/>
+        </a:ln>
+        <a:effectLst/>
+      </dsp:spPr>
+      <dsp:style>
+        <a:lnRef idx="2">
+          <a:scrgbClr r="0" g="0" b="0"/>
+        </a:lnRef>
+        <a:fillRef idx="1">
+          <a:scrgbClr r="0" g="0" b="0"/>
+        </a:fillRef>
+        <a:effectRef idx="0">
+          <a:scrgbClr r="0" g="0" b="0"/>
+        </a:effectRef>
+        <a:fontRef idx="minor">
+          <a:schemeClr val="lt1"/>
+        </a:fontRef>
+      </dsp:style>
+      <dsp:txBody>
+        <a:bodyPr spcFirstLastPara="0" vert="horz" wrap="square" lIns="68580" tIns="68580" rIns="68580" bIns="68580" numCol="1" spcCol="1270" anchor="ctr" anchorCtr="0">
+          <a:noAutofit/>
+        </a:bodyPr>
+        <a:lstStyle/>
+        <a:p>
+          <a:pPr marL="0" lvl="0" indent="0" algn="ctr" defTabSz="800100">
+            <a:lnSpc>
+              <a:spcPct val="90000"/>
+            </a:lnSpc>
+            <a:spcBef>
+              <a:spcPct val="0"/>
+            </a:spcBef>
+            <a:spcAft>
+              <a:spcPct val="35000"/>
+            </a:spcAft>
+            <a:buNone/>
+          </a:pPr>
+          <a:r>
+            <a:rPr lang="zh-CN" altLang="en-US" sz="1800" kern="1200" dirty="0"/>
+            <a:t>粘土</a:t>
+          </a:r>
+        </a:p>
+      </dsp:txBody>
+      <dsp:txXfrm>
+        <a:off x="0" y="1722843"/>
+        <a:ext cx="845015" cy="507008"/>
+      </dsp:txXfrm>
+    </dsp:sp>
+    <dsp:sp modelId="{3DE84D8B-091B-844D-8D08-F42F60078744}">
+      <dsp:nvSpPr>
+        <dsp:cNvPr id="0" name=""/>
+        <dsp:cNvSpPr/>
+      </dsp:nvSpPr>
+      <dsp:spPr>
+        <a:xfrm>
+          <a:off x="0" y="2314353"/>
+          <a:ext cx="845015" cy="507008"/>
+        </a:xfrm>
+        <a:prstGeom prst="rect">
+          <a:avLst/>
+        </a:prstGeom>
+        <a:solidFill>
+          <a:schemeClr val="accent1">
+            <a:hueOff val="0"/>
+            <a:satOff val="0"/>
+            <a:lumOff val="0"/>
+            <a:alphaOff val="0"/>
+          </a:schemeClr>
+        </a:solidFill>
+        <a:ln w="19050" cap="flat" cmpd="sng" algn="ctr">
+          <a:solidFill>
+            <a:schemeClr val="lt1">
+              <a:hueOff val="0"/>
+              <a:satOff val="0"/>
+              <a:lumOff val="0"/>
+              <a:alphaOff val="0"/>
+            </a:schemeClr>
+          </a:solidFill>
+          <a:prstDash val="solid"/>
+          <a:miter lim="800000"/>
+        </a:ln>
+        <a:effectLst/>
+      </dsp:spPr>
+      <dsp:style>
+        <a:lnRef idx="2">
+          <a:scrgbClr r="0" g="0" b="0"/>
+        </a:lnRef>
+        <a:fillRef idx="1">
+          <a:scrgbClr r="0" g="0" b="0"/>
+        </a:fillRef>
+        <a:effectRef idx="0">
+          <a:scrgbClr r="0" g="0" b="0"/>
+        </a:effectRef>
+        <a:fontRef idx="minor">
+          <a:schemeClr val="lt1"/>
+        </a:fontRef>
+      </dsp:style>
+      <dsp:txBody>
+        <a:bodyPr spcFirstLastPara="0" vert="horz" wrap="square" lIns="68580" tIns="68580" rIns="68580" bIns="68580" numCol="1" spcCol="1270" anchor="ctr" anchorCtr="0">
+          <a:noAutofit/>
+        </a:bodyPr>
+        <a:lstStyle/>
+        <a:p>
+          <a:pPr marL="0" lvl="0" indent="0" algn="ctr" defTabSz="800100">
+            <a:lnSpc>
+              <a:spcPct val="90000"/>
+            </a:lnSpc>
+            <a:spcBef>
+              <a:spcPct val="0"/>
+            </a:spcBef>
+            <a:spcAft>
+              <a:spcPct val="35000"/>
+            </a:spcAft>
+            <a:buNone/>
+          </a:pPr>
+          <a:r>
+            <a:rPr lang="zh-CN" altLang="en-US" sz="1800" kern="1200" dirty="0"/>
+            <a:t>铁粉</a:t>
+          </a:r>
+        </a:p>
+      </dsp:txBody>
+      <dsp:txXfrm>
+        <a:off x="0" y="2314353"/>
+        <a:ext cx="845015" cy="507008"/>
+      </dsp:txXfrm>
+    </dsp:sp>
+  </dsp:spTree>
+</dsp:drawing>
+</file>
+
+<file path=ppt/diagrams/layout1.xml><?xml version="1.0" encoding="utf-8"?>
+<dgm:layoutDef xmlns:dgm="http://schemas.openxmlformats.org/drawingml/2006/diagram" xmlns:a="http://schemas.openxmlformats.org/drawingml/2006/main" uniqueId="urn:microsoft.com/office/officeart/2005/8/layout/default">
+  <dgm:title val=""/>
+  <dgm:desc val=""/>
+  <dgm:catLst>
+    <dgm:cat type="list" pri="400"/>
+  </dgm:catLst>
+  <dgm:sampData>
+    <dgm:dataModel>
+      <dgm:ptLst>
+        <dgm:pt modelId="0" type="doc"/>
+        <dgm:pt modelId="1">
+          <dgm:prSet phldr="1"/>
+        </dgm:pt>
+        <dgm:pt modelId="2">
+          <dgm:prSet phldr="1"/>
+        </dgm:pt>
+        <dgm:pt modelId="3">
+          <dgm:prSet phldr="1"/>
+        </dgm:pt>
+        <dgm:pt modelId="4">
+          <dgm:prSet phldr="1"/>
+        </dgm:pt>
+        <dgm:pt modelId="5">
+          <dgm:prSet phldr="1"/>
+        </dgm:pt>
+      </dgm:ptLst>
+      <dgm:cxnLst>
+        <dgm:cxn modelId="6" srcId="0" destId="1" srcOrd="0" destOrd="0"/>
+        <dgm:cxn modelId="7" srcId="0" destId="2" srcOrd="1" destOrd="0"/>
+        <dgm:cxn modelId="8" srcId="0" destId="3" srcOrd="2" destOrd="0"/>
+        <dgm:cxn modelId="9" srcId="0" destId="4" srcOrd="3" destOrd="0"/>
+        <dgm:cxn modelId="10" srcId="0" destId="5" srcOrd="4" destOrd="0"/>
+      </dgm:cxnLst>
+      <dgm:bg/>
+      <dgm:whole/>
+    </dgm:dataModel>
+  </dgm:sampData>
+  <dgm:styleData>
+    <dgm:dataModel>
+      <dgm:ptLst>
+        <dgm:pt modelId="0" type="doc"/>
+        <dgm:pt modelId="1"/>
+        <dgm:pt modelId="2"/>
+      </dgm:ptLst>
+      <dgm:cxnLst>
+        <dgm:cxn modelId="3" srcId="0" destId="1" srcOrd="0" destOrd="0"/>
+        <dgm:cxn modelId="4" srcId="0" destId="2" srcOrd="1" destOrd="0"/>
+      </dgm:cxnLst>
+      <dgm:bg/>
+      <dgm:whole/>
+    </dgm:dataModel>
+  </dgm:styleData>
+  <dgm:clrData>
+    <dgm:dataModel>
+      <dgm:ptLst>
+        <dgm:pt modelId="0" type="doc"/>
+        <dgm:pt modelId="1"/>
+        <dgm:pt modelId="2"/>
+        <dgm:pt modelId="3"/>
+        <dgm:pt modelId="4"/>
+        <dgm:pt modelId="5"/>
+        <dgm:pt modelId="6"/>
+      </dgm:ptLst>
+      <dgm:cxnLst>
+        <dgm:cxn modelId="7" srcId="0" destId="1" srcOrd="0" destOrd="0"/>
+        <dgm:cxn modelId="8" srcId="0" destId="2" srcOrd="1" destOrd="0"/>
+        <dgm:cxn modelId="9" srcId="0" destId="3" srcOrd="2" destOrd="0"/>
+        <dgm:cxn modelId="10" srcId="0" destId="4" srcOrd="3" destOrd="0"/>
+        <dgm:cxn modelId="11" srcId="0" destId="5" srcOrd="4" destOrd="0"/>
+        <dgm:cxn modelId="12" srcId="0" destId="6" srcOrd="5" destOrd="0"/>
+      </dgm:cxnLst>
+      <dgm:bg/>
+      <dgm:whole/>
+    </dgm:dataModel>
+  </dgm:clrData>
+  <dgm:layoutNode name="diagram">
+    <dgm:varLst>
+      <dgm:dir/>
+      <dgm:resizeHandles val="exact"/>
+    </dgm:varLst>
+    <dgm:choose name="Name0">
+      <dgm:if name="Name1" func="var" arg="dir" op="equ" val="norm">
+        <dgm:alg type="snake">
+          <dgm:param type="grDir" val="tL"/>
+          <dgm:param type="flowDir" val="row"/>
+          <dgm:param type="contDir" val="sameDir"/>
+          <dgm:param type="off" val="ctr"/>
+        </dgm:alg>
+      </dgm:if>
+      <dgm:else name="Name2">
+        <dgm:alg type="snake">
+          <dgm:param type="grDir" val="tR"/>
+          <dgm:param type="flowDir" val="row"/>
+          <dgm:param type="contDir" val="sameDir"/>
+          <dgm:param type="off" val="ctr"/>
+        </dgm:alg>
+      </dgm:else>
+    </dgm:choose>
+    <dgm:shape xmlns:r="http://schemas.openxmlformats.org/officeDocument/2006/relationships" r:blip="">
+      <dgm:adjLst/>
+    </dgm:shape>
+    <dgm:presOf/>
+    <dgm:constrLst>
+      <dgm:constr type="w" for="ch" forName="node" refType="w"/>
+      <dgm:constr type="h" for="ch" forName="node" refType="w" refFor="ch" refForName="node" fact="0.6"/>
+      <dgm:constr type="w" for="ch" forName="sibTrans" refType="w" refFor="ch" refForName="node" fact="0.1"/>
+      <dgm:constr type="sp" refType="w" refFor="ch" refForName="sibTrans"/>
+      <dgm:constr type="primFontSz" for="ch" forName="node" op="equ" val="65"/>
+    </dgm:constrLst>
+    <dgm:ruleLst/>
+    <dgm:forEach name="Name3" axis="ch" ptType="node">
+      <dgm:layoutNode name="node">
+        <dgm:varLst>
+          <dgm:bulletEnabled val="1"/>
+        </dgm:varLst>
+        <dgm:alg type="tx"/>
+        <dgm:shape xmlns:r="http://schemas.openxmlformats.org/officeDocument/2006/relationships" type="rect" r:blip="">
+          <dgm:adjLst/>
+        </dgm:shape>
+        <dgm:presOf axis="desOrSelf" ptType="node"/>
+        <dgm:constrLst>
+          <dgm:constr type="lMarg" refType="primFontSz" fact="0.3"/>
+          <dgm:constr type="rMarg" refType="primFontSz" fact="0.3"/>
+          <dgm:constr type="tMarg" refType="primFontSz" fact="0.3"/>
+          <dgm:constr type="bMarg" refType="primFontSz" fact="0.3"/>
+        </dgm:constrLst>
+        <dgm:ruleLst>
+          <dgm:rule type="primFontSz" val="5" fact="NaN" max="NaN"/>
+        </dgm:ruleLst>
+      </dgm:layoutNode>
+      <dgm:forEach name="Name4" axis="followSib" ptType="sibTrans" cnt="1">
+        <dgm:layoutNode name="sibTrans">
+          <dgm:alg type="sp"/>
+          <dgm:shape xmlns:r="http://schemas.openxmlformats.org/officeDocument/2006/relationships" r:blip="">
+            <dgm:adjLst/>
+          </dgm:shape>
+          <dgm:presOf/>
+          <dgm:constrLst/>
+          <dgm:ruleLst/>
+        </dgm:layoutNode>
+      </dgm:forEach>
+    </dgm:forEach>
+  </dgm:layoutNode>
+</dgm:layoutDef>
+</file>
+
+<file path=ppt/diagrams/quickStyle1.xml><?xml version="1.0" encoding="utf-8"?>
+<dgm:styleDef xmlns:dgm="http://schemas.openxmlformats.org/drawingml/2006/diagram" xmlns:a="http://schemas.openxmlformats.org/drawingml/2006/main" uniqueId="urn:microsoft.com/office/officeart/2005/8/quickstyle/simple1">
+  <dgm:title val=""/>
+  <dgm:desc val=""/>
+  <dgm:catLst>
+    <dgm:cat type="simple" pri="10100"/>
+  </dgm:catLst>
+  <dgm:scene3d>
+    <a:camera prst="orthographicFront"/>
+    <a:lightRig rig="threePt" dir="t"/>
+  </dgm:scene3d>
+  <dgm:styleLbl name="node0">
+    <dgm:scene3d>
+      <a:camera prst="orthographicFront"/>
+      <a:lightRig rig="threePt" dir="t"/>
+    </dgm:scene3d>
+    <dgm:sp3d/>
+    <dgm:txPr/>
+    <dgm:style>
+      <a:lnRef idx="2">
+        <a:scrgbClr r="0" g="0" b="0"/>
+      </a:lnRef>
+      <a:fillRef idx="1">
+        <a:scrgbClr r="0" g="0" b="0"/>
+      </a:fillRef>
+      <a:effectRef idx="0">
+        <a:scrgbClr r="0" g="0" b="0"/>
+      </a:effectRef>
+      <a:fontRef idx="minor">
+        <a:schemeClr val="lt1"/>
+      </a:fontRef>
+    </dgm:style>
+  </dgm:styleLbl>
+  <dgm:styleLbl name="lnNode1">
+    <dgm:scene3d>
+      <a:camera prst="orthographicFront"/>
+      <a:lightRig rig="threePt" dir="t"/>
+    </dgm:scene3d>
+    <dgm:sp3d/>
+    <dgm:txPr/>
+    <dgm:style>
+      <a:lnRef idx="2">
+        <a:scrgbClr r="0" g="0" b="0"/>
+      </a:lnRef>
+      <a:fillRef idx="1">
+        <a:scrgbClr r="0" g="0" b="0"/>
+      </a:fillRef>
+      <a:effectRef idx="0">
+        <a:scrgbClr r="0" g="0" b="0"/>
+      </a:effectRef>
+      <a:fontRef idx="minor">
+        <a:schemeClr val="lt1"/>
+      </a:fontRef>
+    </dgm:style>
+  </dgm:styleLbl>
+  <dgm:styleLbl name="vennNode1">
+    <dgm:scene3d>
+      <a:camera prst="orthographicFront"/>
+      <a:lightRig rig="threePt" dir="t"/>
+    </dgm:scene3d>
+    <dgm:sp3d/>
+    <dgm:txPr/>
+    <dgm:style>
+      <a:lnRef idx="2">
+        <a:scrgbClr r="0" g="0" b="0"/>
+      </a:lnRef>
+      <a:fillRef idx="1">
+        <a:scrgbClr r="0" g="0" b="0"/>
+      </a:fillRef>
+      <a:effectRef idx="0">
+        <a:scrgbClr r="0" g="0" b="0"/>
+      </a:effectRef>
+      <a:fontRef idx="minor">
+        <a:schemeClr val="tx1"/>
+      </a:fontRef>
+    </dgm:style>
+  </dgm:styleLbl>
+  <dgm:styleLbl name="alignNode1">
+    <dgm:scene3d>
+      <a:camera prst="orthographicFront"/>
+      <a:lightRig rig="threePt" dir="t"/>
+    </dgm:scene3d>
+    <dgm:sp3d/>
+    <dgm:txPr/>
+    <dgm:style>
+      <a:lnRef idx="2">
+        <a:scrgbClr r="0" g="0" b="0"/>
+      </a:lnRef>
+      <a:fillRef idx="1">
+        <a:scrgbClr r="0" g="0" b="0"/>
+      </a:fillRef>
+      <a:effectRef idx="0">
+        <a:scrgbClr r="0" g="0" b="0"/>
+      </a:effectRef>
+      <a:fontRef idx="minor">
+        <a:schemeClr val="lt1"/>
+      </a:fontRef>
+    </dgm:style>
+  </dgm:styleLbl>
+  <dgm:styleLbl name="node1">
+    <dgm:scene3d>
+      <a:camera prst="orthographicFront"/>
+      <a:lightRig rig="threePt" dir="t"/>
+    </dgm:scene3d>
+    <dgm:sp3d/>
+    <dgm:txPr/>
+    <dgm:style>
+      <a:lnRef idx="2">
+        <a:scrgbClr r="0" g="0" b="0"/>
+      </a:lnRef>
+      <a:fillRef idx="1">
+        <a:scrgbClr r="0" g="0" b="0"/>
+      </a:fillRef>
+      <a:effectRef idx="0">
+        <a:scrgbClr r="0" g="0" b="0"/>
+      </a:effectRef>
+      <a:fontRef idx="minor">
+        <a:schemeClr val="lt1"/>
+      </a:fontRef>
+    </dgm:style>
+  </dgm:styleLbl>
+  <dgm:styleLbl name="node2">
+    <dgm:scene3d>
+      <a:camera prst="orthographicFront"/>
+      <a:lightRig rig="threePt" dir="t"/>
+    </dgm:scene3d>
+    <dgm:sp3d/>
+    <dgm:txPr/>
+    <dgm:style>
+      <a:lnRef idx="2">
+        <a:scrgbClr r="0" g="0" b="0"/>
+      </a:lnRef>
+      <a:fillRef idx="1">
+        <a:scrgbClr r="0" g="0" b="0"/>
+      </a:fillRef>
+      <a:effectRef idx="0">
+        <a:scrgbClr r="0" g="0" b="0"/>
+      </a:effectRef>
+      <a:fontRef idx="minor">
+        <a:schemeClr val="lt1"/>
+      </a:fontRef>
+    </dgm:style>
+  </dgm:styleLbl>
+  <dgm:styleLbl name="node3">
+    <dgm:scene3d>
+      <a:camera prst="orthographicFront"/>
+      <a:lightRig rig="threePt" dir="t"/>
+    </dgm:scene3d>
+    <dgm:sp3d/>
+    <dgm:txPr/>
+    <dgm:style>
+      <a:lnRef idx="2">
+        <a:scrgbClr r="0" g="0" b="0"/>
+      </a:lnRef>
+      <a:fillRef idx="1">
+        <a:scrgbClr r="0" g="0" b="0"/>
+      </a:fillRef>
+      <a:effectRef idx="0">
+        <a:scrgbClr r="0" g="0" b="0"/>
+      </a:effectRef>
+      <a:fontRef idx="minor">
+        <a:schemeClr val="lt1"/>
+      </a:fontRef>
+    </dgm:style>
+  </dgm:styleLbl>
+  <dgm:styleLbl name="node4">
+    <dgm:scene3d>
+      <a:camera prst="orthographicFront"/>
+      <a:lightRig rig="threePt" dir="t"/>
+    </dgm:scene3d>
+    <dgm:sp3d/>
+    <dgm:txPr/>
+    <dgm:style>
+      <a:lnRef idx="2">
+        <a:scrgbClr r="0" g="0" b="0"/>
+      </a:lnRef>
+      <a:fillRef idx="1">
+        <a:scrgbClr r="0" g="0" b="0"/>
+      </a:fillRef>
+      <a:effectRef idx="0">
+        <a:scrgbClr r="0" g="0" b="0"/>
+      </a:effectRef>
+      <a:fontRef idx="minor">
+        <a:schemeClr val="lt1"/>
+      </a:fontRef>
+    </dgm:style>
+  </dgm:styleLbl>
+  <dgm:styleLbl name="fgImgPlace1">
+    <dgm:scene3d>
+      <a:camera prst="orthographicFront"/>
+      <a:lightRig rig="threePt" dir="t"/>
+    </dgm:scene3d>
+    <dgm:sp3d/>
+    <dgm:txPr/>
+    <dgm:style>
+      <a:lnRef idx="2">
+        <a:scrgbClr r="0" g="0" b="0"/>
+      </a:lnRef>
+      <a:fillRef idx="1">
+        <a:scrgbClr r="0" g="0" b="0"/>
+      </a:fillRef>
+      <a:effectRef idx="0">
+        <a:scrgbClr r="0" g="0" b="0"/>
+      </a:effectRef>
+      <a:fontRef idx="minor"/>
+    </dgm:style>
+  </dgm:styleLbl>
+  <dgm:styleLbl name="alignImgPlace1">
+    <dgm:scene3d>
+      <a:camera prst="orthographicFront"/>
+      <a:lightRig rig="threePt" dir="t"/>
+    </dgm:scene3d>
+    <dgm:sp3d/>
+    <dgm:txPr/>
+    <dgm:style>
+      <a:lnRef idx="2">
+        <a:scrgbClr r="0" g="0" b="0"/>
+      </a:lnRef>
+      <a:fillRef idx="1">
+        <a:scrgbClr r="0" g="0" b="0"/>
+      </a:fillRef>
+      <a:effectRef idx="0">
+        <a:scrgbClr r="0" g="0" b="0"/>
+      </a:effectRef>
+      <a:fontRef idx="minor"/>
+    </dgm:style>
+  </dgm:styleLbl>
+  <dgm:styleLbl name="bgImgPlace1">
+    <dgm:scene3d>
+      <a:camera prst="orthographicFront"/>
+      <a:lightRig rig="threePt" dir="t"/>
+    </dgm:scene3d>
+    <dgm:sp3d/>
+    <dgm:txPr/>
+    <dgm:style>
+      <a:lnRef idx="2">
+        <a:scrgbClr r="0" g="0" b="0"/>
+      </a:lnRef>
+      <a:fillRef idx="1">
+        <a:scrgbClr r="0" g="0" b="0"/>
+      </a:fillRef>
+      <a:effectRef idx="0">
+        <a:scrgbClr r="0" g="0" b="0"/>
+      </a:effectRef>
+      <a:fontRef idx="minor"/>
+    </dgm:style>
+  </dgm:styleLbl>
+  <dgm:styleLbl name="sibTrans2D1">
+    <dgm:scene3d>
+      <a:camera prst="orthographicFront"/>
+      <a:lightRig rig="threePt" dir="t"/>
+    </dgm:scene3d>
+    <dgm:sp3d/>
+    <dgm:txPr/>
+    <dgm:style>
+      <a:lnRef idx="0">
+        <a:scrgbClr r="0" g="0" b="0"/>
+      </a:lnRef>
+      <a:fillRef idx="1">
+        <a:scrgbClr r="0" g="0" b="0"/>
+      </a:fillRef>
+      <a:effectRef idx="0">
+        <a:scrgbClr r="0" g="0" b="0"/>
+      </a:effectRef>
+      <a:fontRef idx="minor">
+        <a:schemeClr val="lt1"/>
+      </a:fontRef>
+    </dgm:style>
+  </dgm:styleLbl>
+  <dgm:styleLbl name="fgSibTrans2D1">
+    <dgm:scene3d>
+      <a:camera prst="orthographicFront"/>
+      <a:lightRig rig="threePt" dir="t"/>
+    </dgm:scene3d>
+    <dgm:sp3d/>
+    <dgm:txPr/>
+    <dgm:style>
+      <a:lnRef idx="0">
+        <a:scrgbClr r="0" g="0" b="0"/>
+      </a:lnRef>
+      <a:fillRef idx="1">
+        <a:scrgbClr r="0" g="0" b="0"/>
+      </a:fillRef>
+      <a:effectRef idx="0">
+        <a:scrgbClr r="0" g="0" b="0"/>
+      </a:effectRef>
+      <a:fontRef idx="minor">
+        <a:schemeClr val="lt1"/>
+      </a:fontRef>
+    </dgm:style>
+  </dgm:styleLbl>
+  <dgm:styleLbl name="bgSibTrans2D1">
+    <dgm:scene3d>
+      <a:camera prst="orthographicFront"/>
+      <a:lightRig rig="threePt" dir="t"/>
+    </dgm:scene3d>
+    <dgm:sp3d/>
+    <dgm:txPr/>
+    <dgm:style>
+      <a:lnRef idx="0">
+        <a:scrgbClr r="0" g="0" b="0"/>
+      </a:lnRef>
+      <a:fillRef idx="1">
+        <a:scrgbClr r="0" g="0" b="0"/>
+      </a:fillRef>
+      <a:effectRef idx="0">
+        <a:scrgbClr r="0" g="0" b="0"/>
+      </a:effectRef>
+      <a:fontRef idx="minor">
+        <a:schemeClr val="lt1"/>
+      </a:fontRef>
+    </dgm:style>
+  </dgm:styleLbl>
+  <dgm:styleLbl name="sibTrans1D1">
+    <dgm:scene3d>
+      <a:camera prst="orthographicFront"/>
+      <a:lightRig rig="threePt" dir="t"/>
+    </dgm:scene3d>
+    <dgm:sp3d/>
+    <dgm:txPr/>
+    <dgm:style>
+      <a:lnRef idx="1">
+        <a:scrgbClr r="0" g="0" b="0"/>
+      </a:lnRef>
+      <a:fillRef idx="0">
+        <a:scrgbClr r="0" g="0" b="0"/>
+      </a:fillRef>
+      <a:effectRef idx="0">
+        <a:scrgbClr r="0" g="0" b="0"/>
+      </a:effectRef>
+      <a:fontRef idx="minor"/>
+    </dgm:style>
+  </dgm:styleLbl>
+  <dgm:styleLbl name="callout">
+    <dgm:scene3d>
+      <a:camera prst="orthographicFront"/>
+      <a:lightRig rig="threePt" dir="t"/>
+    </dgm:scene3d>
+    <dgm:sp3d/>
+    <dgm:txPr/>
+    <dgm:style>
+      <a:lnRef idx="2">
+        <a:scrgbClr r="0" g="0" b="0"/>
+      </a:lnRef>
+      <a:fillRef idx="1">
+        <a:scrgbClr r="0" g="0" b="0"/>
+      </a:fillRef>
+      <a:effectRef idx="0">
+        <a:scrgbClr r="0" g="0" b="0"/>
+      </a:effectRef>
+      <a:fontRef idx="minor"/>
+    </dgm:style>
+  </dgm:styleLbl>
+  <dgm:styleLbl name="asst0">
+    <dgm:scene3d>
+      <a:camera prst="orthographicFront"/>
+      <a:lightRig rig="threePt" dir="t"/>
+    </dgm:scene3d>
+    <dgm:sp3d/>
+    <dgm:txPr/>
+    <dgm:style>
+      <a:lnRef idx="2">
+        <a:scrgbClr r="0" g="0" b="0"/>
+      </a:lnRef>
+      <a:fillRef idx="1">
+        <a:scrgbClr r="0" g="0" b="0"/>
+      </a:fillRef>
+      <a:effectRef idx="0">
+        <a:scrgbClr r="0" g="0" b="0"/>
+      </a:effectRef>
+      <a:fontRef idx="minor">
+        <a:schemeClr val="lt1"/>
+      </a:fontRef>
+    </dgm:style>
+  </dgm:styleLbl>
+  <dgm:styleLbl name="asst1">
+    <dgm:scene3d>
+      <a:camera prst="orthographicFront"/>
+      <a:lightRig rig="threePt" dir="t"/>
+    </dgm:scene3d>
+    <dgm:sp3d/>
+    <dgm:txPr/>
+    <dgm:style>
+      <a:lnRef idx="2">
+        <a:scrgbClr r="0" g="0" b="0"/>
+      </a:lnRef>
+      <a:fillRef idx="1">
+        <a:scrgbClr r="0" g="0" b="0"/>
+      </a:fillRef>
+      <a:effectRef idx="0">
+        <a:scrgbClr r="0" g="0" b="0"/>
+      </a:effectRef>
+      <a:fontRef idx="minor">
+        <a:schemeClr val="lt1"/>
+      </a:fontRef>
+    </dgm:style>
+  </dgm:styleLbl>
+  <dgm:styleLbl name="asst2">
+    <dgm:scene3d>
+      <a:camera prst="orthographicFront"/>
+      <a:lightRig rig="threePt" dir="t"/>
+    </dgm:scene3d>
+    <dgm:sp3d/>
+    <dgm:txPr/>
+    <dgm:style>
+      <a:lnRef idx="2">
+        <a:scrgbClr r="0" g="0" b="0"/>
+      </a:lnRef>
+      <a:fillRef idx="1">
+        <a:scrgbClr r="0" g="0" b="0"/>
+      </a:fillRef>
+      <a:effectRef idx="0">
+        <a:scrgbClr r="0" g="0" b="0"/>
+      </a:effectRef>
+      <a:fontRef idx="minor">
+        <a:schemeClr val="lt1"/>
+      </a:fontRef>
+    </dgm:style>
+  </dgm:styleLbl>
+  <dgm:styleLbl name="asst3">
+    <dgm:scene3d>
+      <a:camera prst="orthographicFront"/>
+      <a:lightRig rig="threePt" dir="t"/>
+    </dgm:scene3d>
+    <dgm:sp3d/>
+    <dgm:txPr/>
+    <dgm:style>
+      <a:lnRef idx="2">
+        <a:scrgbClr r="0" g="0" b="0"/>
+      </a:lnRef>
+      <a:fillRef idx="1">
+        <a:scrgbClr r="0" g="0" b="0"/>
+      </a:fillRef>
+      <a:effectRef idx="0">
+        <a:scrgbClr r="0" g="0" b="0"/>
+      </a:effectRef>
+      <a:fontRef idx="minor">
+        <a:schemeClr val="lt1"/>
+      </a:fontRef>
+    </dgm:style>
+  </dgm:styleLbl>
+  <dgm:styleLbl name="asst4">
+    <dgm:scene3d>
+      <a:camera prst="orthographicFront"/>
+      <a:lightRig rig="threePt" dir="t"/>
+    </dgm:scene3d>
+    <dgm:sp3d/>
+    <dgm:txPr/>
+    <dgm:style>
+      <a:lnRef idx="2">
+        <a:scrgbClr r="0" g="0" b="0"/>
+      </a:lnRef>
+      <a:fillRef idx="1">
+        <a:scrgbClr r="0" g="0" b="0"/>
+      </a:fillRef>
+      <a:effectRef idx="0">
+        <a:scrgbClr r="0" g="0" b="0"/>
+      </a:effectRef>
+      <a:fontRef idx="minor">
+        <a:schemeClr val="lt1"/>
+      </a:fontRef>
+    </dgm:style>
+  </dgm:styleLbl>
+  <dgm:styleLbl name="parChTrans2D1">
+    <dgm:scene3d>
+      <a:camera prst="orthographicFront"/>
+      <a:lightRig rig="threePt" dir="t"/>
+    </dgm:scene3d>
+    <dgm:sp3d/>
+    <dgm:txPr/>
+    <dgm:style>
+      <a:lnRef idx="2">
+        <a:scrgbClr r="0" g="0" b="0"/>
+      </a:lnRef>
+      <a:fillRef idx="1">
+        <a:scrgbClr r="0" g="0" b="0"/>
+      </a:fillRef>
+      <a:effectRef idx="0">
+        <a:scrgbClr r="0" g="0" b="0"/>
+      </a:effectRef>
+      <a:fontRef idx="minor">
+        <a:schemeClr val="lt1"/>
+      </a:fontRef>
+    </dgm:style>
+  </dgm:styleLbl>
+  <dgm:styleLbl name="parChTrans2D2">
+    <dgm:scene3d>
+      <a:camera prst="orthographicFront"/>
+      <a:lightRig rig="threePt" dir="t"/>
+    </dgm:scene3d>
+    <dgm:sp3d/>
+    <dgm:txPr/>
+    <dgm:style>
+      <a:lnRef idx="2">
+        <a:scrgbClr r="0" g="0" b="0"/>
+      </a:lnRef>
+      <a:fillRef idx="1">
+        <a:scrgbClr r="0" g="0" b="0"/>
+      </a:fillRef>
+      <a:effectRef idx="0">
+        <a:scrgbClr r="0" g="0" b="0"/>
+      </a:effectRef>
+      <a:fontRef idx="minor">
+        <a:schemeClr val="lt1"/>
+      </a:fontRef>
+    </dgm:style>
+  </dgm:styleLbl>
+  <dgm:styleLbl name="parChTrans2D3">
+    <dgm:scene3d>
+      <a:camera prst="orthographicFront"/>
+      <a:lightRig rig="threePt" dir="t"/>
+    </dgm:scene3d>
+    <dgm:sp3d/>
+    <dgm:txPr/>
+    <dgm:style>
+      <a:lnRef idx="2">
+        <a:scrgbClr r="0" g="0" b="0"/>
+      </a:lnRef>
+      <a:fillRef idx="1">
+        <a:scrgbClr r="0" g="0" b="0"/>
+      </a:fillRef>
+      <a:effectRef idx="0">
+        <a:scrgbClr r="0" g="0" b="0"/>
+      </a:effectRef>
+      <a:fontRef idx="minor">
+        <a:schemeClr val="lt1"/>
+      </a:fontRef>
+    </dgm:style>
+  </dgm:styleLbl>
+  <dgm:styleLbl name="parChTrans2D4">
+    <dgm:scene3d>
+      <a:camera prst="orthographicFront"/>
+      <a:lightRig rig="threePt" dir="t"/>
+    </dgm:scene3d>
+    <dgm:sp3d/>
+    <dgm:txPr/>
+    <dgm:style>
+      <a:lnRef idx="2">
+        <a:scrgbClr r="0" g="0" b="0"/>
+      </a:lnRef>
+      <a:fillRef idx="1">
+        <a:scrgbClr r="0" g="0" b="0"/>
+      </a:fillRef>
+      <a:effectRef idx="0">
+        <a:scrgbClr r="0" g="0" b="0"/>
+      </a:effectRef>
+      <a:fontRef idx="minor">
+        <a:schemeClr val="lt1"/>
+      </a:fontRef>
+    </dgm:style>
+  </dgm:styleLbl>
+  <dgm:styleLbl name="parChTrans1D1">
+    <dgm:scene3d>
+      <a:camera prst="orthographicFront"/>
+      <a:lightRig rig="threePt" dir="t"/>
+    </dgm:scene3d>
+    <dgm:sp3d/>
+    <dgm:txPr/>
+    <dgm:style>
+      <a:lnRef idx="2">
+        <a:scrgbClr r="0" g="0" b="0"/>
+      </a:lnRef>
+      <a:fillRef idx="0">
+        <a:scrgbClr r="0" g="0" b="0"/>
+      </a:fillRef>
+      <a:effectRef idx="0">
+        <a:scrgbClr r="0" g="0" b="0"/>
+      </a:effectRef>
+      <a:fontRef idx="minor"/>
+    </dgm:style>
+  </dgm:styleLbl>
+  <dgm:styleLbl name="parChTrans1D2">
+    <dgm:scene3d>
+      <a:camera prst="orthographicFront"/>
+      <a:lightRig rig="threePt" dir="t"/>
+    </dgm:scene3d>
+    <dgm:sp3d/>
+    <dgm:txPr/>
+    <dgm:style>
+      <a:lnRef idx="2">
+        <a:scrgbClr r="0" g="0" b="0"/>
+      </a:lnRef>
+      <a:fillRef idx="0">
+        <a:scrgbClr r="0" g="0" b="0"/>
+      </a:fillRef>
+      <a:effectRef idx="0">
+        <a:scrgbClr r="0" g="0" b="0"/>
+      </a:effectRef>
+      <a:fontRef idx="minor"/>
+    </dgm:style>
+  </dgm:styleLbl>
+  <dgm:styleLbl name="parChTrans1D3">
+    <dgm:scene3d>
+      <a:camera prst="orthographicFront"/>
+      <a:lightRig rig="threePt" dir="t"/>
+    </dgm:scene3d>
+    <dgm:sp3d/>
+    <dgm:txPr/>
+    <dgm:style>
+      <a:lnRef idx="2">
+        <a:scrgbClr r="0" g="0" b="0"/>
+      </a:lnRef>
+      <a:fillRef idx="0">
+        <a:scrgbClr r="0" g="0" b="0"/>
+      </a:fillRef>
+      <a:effectRef idx="0">
+        <a:scrgbClr r="0" g="0" b="0"/>
+      </a:effectRef>
+      <a:fontRef idx="minor"/>
+    </dgm:style>
+  </dgm:styleLbl>
+  <dgm:styleLbl name="parChTrans1D4">
+    <dgm:scene3d>
+      <a:camera prst="orthographicFront"/>
+      <a:lightRig rig="threePt" dir="t"/>
+    </dgm:scene3d>
+    <dgm:sp3d/>
+    <dgm:txPr/>
+    <dgm:style>
+      <a:lnRef idx="2">
+        <a:scrgbClr r="0" g="0" b="0"/>
+      </a:lnRef>
+      <a:fillRef idx="0">
+        <a:scrgbClr r="0" g="0" b="0"/>
+      </a:fillRef>
+      <a:effectRef idx="0">
+        <a:scrgbClr r="0" g="0" b="0"/>
+      </a:effectRef>
+      <a:fontRef idx="minor"/>
+    </dgm:style>
+  </dgm:styleLbl>
+  <dgm:styleLbl name="fgAcc1">
+    <dgm:scene3d>
+      <a:camera prst="orthographicFront"/>
+      <a:lightRig rig="threePt" dir="t"/>
+    </dgm:scene3d>
+    <dgm:sp3d/>
+    <dgm:txPr/>
+    <dgm:style>
+      <a:lnRef idx="2">
+        <a:scrgbClr r="0" g="0" b="0"/>
+      </a:lnRef>
+      <a:fillRef idx="1">
+        <a:scrgbClr r="0" g="0" b="0"/>
+      </a:fillRef>
+      <a:effectRef idx="0">
+        <a:scrgbClr r="0" g="0" b="0"/>
+      </a:effectRef>
+      <a:fontRef idx="minor"/>
+    </dgm:style>
+  </dgm:styleLbl>
+  <dgm:styleLbl name="conFgAcc1">
+    <dgm:scene3d>
+      <a:camera prst="orthographicFront"/>
+      <a:lightRig rig="threePt" dir="t"/>
+    </dgm:scene3d>
+    <dgm:sp3d/>
+    <dgm:txPr/>
+    <dgm:style>
+      <a:lnRef idx="2">
+        <a:scrgbClr r="0" g="0" b="0"/>
+      </a:lnRef>
+      <a:fillRef idx="1">
+        <a:scrgbClr r="0" g="0" b="0"/>
+      </a:fillRef>
+      <a:effectRef idx="0">
+        <a:scrgbClr r="0" g="0" b="0"/>
+      </a:effectRef>
+      <a:fontRef idx="minor"/>
+    </dgm:style>
+  </dgm:styleLbl>
+  <dgm:styleLbl name="alignAcc1">
+    <dgm:scene3d>
+      <a:camera prst="orthographicFront"/>
+      <a:lightRig rig="threePt" dir="t"/>
+    </dgm:scene3d>
+    <dgm:sp3d/>
+    <dgm:txPr/>
+    <dgm:style>
+      <a:lnRef idx="2">
+        <a:scrgbClr r="0" g="0" b="0"/>
+      </a:lnRef>
+      <a:fillRef idx="1">
+        <a:scrgbClr r="0" g="0" b="0"/>
+      </a:fillRef>
+      <a:effectRef idx="0">
+        <a:scrgbClr r="0" g="0" b="0"/>
+      </a:effectRef>
+      <a:fontRef idx="minor"/>
+    </dgm:style>
+  </dgm:styleLbl>
+  <dgm:styleLbl name="trAlignAcc1">
+    <dgm:scene3d>
+      <a:camera prst="orthographicFront"/>
+      <a:lightRig rig="threePt" dir="t"/>
+    </dgm:scene3d>
+    <dgm:sp3d/>
+    <dgm:txPr/>
+    <dgm:style>
+      <a:lnRef idx="1">
+        <a:scrgbClr r="0" g="0" b="0"/>
+      </a:lnRef>
+      <a:fillRef idx="1">
+        <a:scrgbClr r="0" g="0" b="0"/>
+      </a:fillRef>
+      <a:effectRef idx="0">
+        <a:scrgbClr r="0" g="0" b="0"/>
+      </a:effectRef>
+      <a:fontRef idx="minor"/>
+    </dgm:style>
+  </dgm:styleLbl>
+  <dgm:styleLbl name="bgAcc1">
+    <dgm:scene3d>
+      <a:camera prst="orthographicFront"/>
+      <a:lightRig rig="threePt" dir="t"/>
+    </dgm:scene3d>
+    <dgm:sp3d/>
+    <dgm:txPr/>
+    <dgm:style>
+      <a:lnRef idx="2">
+        <a:scrgbClr r="0" g="0" b="0"/>
+      </a:lnRef>
+      <a:fillRef idx="1">
+        <a:scrgbClr r="0" g="0" b="0"/>
+      </a:fillRef>
+      <a:effectRef idx="0">
+        <a:scrgbClr r="0" g="0" b="0"/>
+      </a:effectRef>
+      <a:fontRef idx="minor"/>
+    </dgm:style>
+  </dgm:styleLbl>
+  <dgm:styleLbl name="solidFgAcc1">
+    <dgm:scene3d>
+      <a:camera prst="orthographicFront"/>
+      <a:lightRig rig="threePt" dir="t"/>
+    </dgm:scene3d>
+    <dgm:sp3d/>
+    <dgm:txPr/>
+    <dgm:style>
+      <a:lnRef idx="2">
+        <a:scrgbClr r="0" g="0" b="0"/>
+      </a:lnRef>
+      <a:fillRef idx="1">
+        <a:scrgbClr r="0" g="0" b="0"/>
+      </a:fillRef>
+      <a:effectRef idx="0">
+        <a:scrgbClr r="0" g="0" b="0"/>
+      </a:effectRef>
+      <a:fontRef idx="minor"/>
+    </dgm:style>
+  </dgm:styleLbl>
+  <dgm:styleLbl name="solidAlignAcc1">
+    <dgm:scene3d>
+      <a:camera prst="orthographicFront"/>
+      <a:lightRig rig="threePt" dir="t"/>
+    </dgm:scene3d>
+    <dgm:sp3d/>
+    <dgm:txPr/>
+    <dgm:style>
+      <a:lnRef idx="2">
+        <a:scrgbClr r="0" g="0" b="0"/>
+      </a:lnRef>
+      <a:fillRef idx="1">
+        <a:scrgbClr r="0" g="0" b="0"/>
+      </a:fillRef>
+      <a:effectRef idx="0">
+        <a:scrgbClr r="0" g="0" b="0"/>
+      </a:effectRef>
+      <a:fontRef idx="minor"/>
+    </dgm:style>
+  </dgm:styleLbl>
+  <dgm:styleLbl name="solidBgAcc1">
+    <dgm:scene3d>
+      <a:camera prst="orthographicFront"/>
+      <a:lightRig rig="threePt" dir="t"/>
+    </dgm:scene3d>
+    <dgm:sp3d/>
+    <dgm:txPr/>
+    <dgm:style>
+      <a:lnRef idx="2">
+        <a:scrgbClr r="0" g="0" b="0"/>
+      </a:lnRef>
+      <a:fillRef idx="1">
+        <a:scrgbClr r="0" g="0" b="0"/>
+      </a:fillRef>
+      <a:effectRef idx="0">
+        <a:scrgbClr r="0" g="0" b="0"/>
+      </a:effectRef>
+      <a:fontRef idx="minor"/>
+    </dgm:style>
+  </dgm:styleLbl>
+  <dgm:styleLbl name="fgAccFollowNode1">
+    <dgm:scene3d>
+      <a:camera prst="orthographicFront"/>
+      <a:lightRig rig="threePt" dir="t"/>
+    </dgm:scene3d>
+    <dgm:sp3d/>
+    <dgm:txPr/>
+    <dgm:style>
+      <a:lnRef idx="2">
+        <a:scrgbClr r="0" g="0" b="0"/>
+      </a:lnRef>
+      <a:fillRef idx="1">
+        <a:scrgbClr r="0" g="0" b="0"/>
+      </a:fillRef>
+      <a:effectRef idx="0">
+        <a:scrgbClr r="0" g="0" b="0"/>
+      </a:effectRef>
+      <a:fontRef idx="minor"/>
+    </dgm:style>
+  </dgm:styleLbl>
+  <dgm:styleLbl name="alignAccFollowNode1">
+    <dgm:scene3d>
+      <a:camera prst="orthographicFront"/>
+      <a:lightRig rig="threePt" dir="t"/>
+    </dgm:scene3d>
+    <dgm:sp3d/>
+    <dgm:txPr/>
+    <dgm:style>
+      <a:lnRef idx="2">
+        <a:scrgbClr r="0" g="0" b="0"/>
+      </a:lnRef>
+      <a:fillRef idx="1">
+        <a:scrgbClr r="0" g="0" b="0"/>
+      </a:fillRef>
+      <a:effectRef idx="0">
+        <a:scrgbClr r="0" g="0" b="0"/>
+      </a:effectRef>
+      <a:fontRef idx="minor"/>
+    </dgm:style>
+  </dgm:styleLbl>
+  <dgm:styleLbl name="bgAccFollowNode1">
+    <dgm:scene3d>
+      <a:camera prst="orthographicFront"/>
+      <a:lightRig rig="threePt" dir="t"/>
+    </dgm:scene3d>
+    <dgm:sp3d/>
+    <dgm:txPr/>
+    <dgm:style>
+      <a:lnRef idx="2">
+        <a:scrgbClr r="0" g="0" b="0"/>
+      </a:lnRef>
+      <a:fillRef idx="1">
+        <a:scrgbClr r="0" g="0" b="0"/>
+      </a:fillRef>
+      <a:effectRef idx="0">
+        <a:scrgbClr r="0" g="0" b="0"/>
+      </a:effectRef>
+      <a:fontRef idx="minor"/>
+    </dgm:style>
+  </dgm:styleLbl>
+  <dgm:styleLbl name="fgAcc0">
+    <dgm:scene3d>
+      <a:camera prst="orthographicFront"/>
+      <a:lightRig rig="threePt" dir="t"/>
+    </dgm:scene3d>
+    <dgm:sp3d/>
+    <dgm:txPr/>
+    <dgm:style>
+      <a:lnRef idx="2">
+        <a:scrgbClr r="0" g="0" b="0"/>
+      </a:lnRef>
+      <a:fillRef idx="1">
+        <a:scrgbClr r="0" g="0" b="0"/>
+      </a:fillRef>
+      <a:effectRef idx="0">
+        <a:scrgbClr r="0" g="0" b="0"/>
+      </a:effectRef>
+      <a:fontRef idx="minor"/>
+    </dgm:style>
+  </dgm:styleLbl>
+  <dgm:styleLbl name="fgAcc2">
+    <dgm:scene3d>
+      <a:camera prst="orthographicFront"/>
+      <a:lightRig rig="threePt" dir="t"/>
+    </dgm:scene3d>
+    <dgm:sp3d/>
+    <dgm:txPr/>
+    <dgm:style>
+      <a:lnRef idx="2">
+        <a:scrgbClr r="0" g="0" b="0"/>
+      </a:lnRef>
+      <a:fillRef idx="1">
+        <a:scrgbClr r="0" g="0" b="0"/>
+      </a:fillRef>
+      <a:effectRef idx="0">
+        <a:scrgbClr r="0" g="0" b="0"/>
+      </a:effectRef>
+      <a:fontRef idx="minor"/>
+    </dgm:style>
+  </dgm:styleLbl>
+  <dgm:styleLbl name="fgAcc3">
+    <dgm:scene3d>
+      <a:camera prst="orthographicFront"/>
+      <a:lightRig rig="threePt" dir="t"/>
+    </dgm:scene3d>
+    <dgm:sp3d/>
+    <dgm:txPr/>
+    <dgm:style>
+      <a:lnRef idx="2">
+        <a:scrgbClr r="0" g="0" b="0"/>
+      </a:lnRef>
+      <a:fillRef idx="1">
+        <a:scrgbClr r="0" g="0" b="0"/>
+      </a:fillRef>
+      <a:effectRef idx="0">
+        <a:scrgbClr r="0" g="0" b="0"/>
+      </a:effectRef>
+      <a:fontRef idx="minor"/>
+    </dgm:style>
+  </dgm:styleLbl>
+  <dgm:styleLbl name="fgAcc4">
+    <dgm:scene3d>
+      <a:camera prst="orthographicFront"/>
+      <a:lightRig rig="threePt" dir="t"/>
+    </dgm:scene3d>
+    <dgm:sp3d/>
+    <dgm:txPr/>
+    <dgm:style>
+      <a:lnRef idx="2">
+        <a:scrgbClr r="0" g="0" b="0"/>
+      </a:lnRef>
+      <a:fillRef idx="1">
+        <a:scrgbClr r="0" g="0" b="0"/>
+      </a:fillRef>
+      <a:effectRef idx="0">
+        <a:scrgbClr r="0" g="0" b="0"/>
+      </a:effectRef>
+      <a:fontRef idx="minor"/>
+    </dgm:style>
+  </dgm:styleLbl>
+  <dgm:styleLbl name="bgShp">
+    <dgm:scene3d>
+      <a:camera prst="orthographicFront"/>
+      <a:lightRig rig="threePt" dir="t"/>
+    </dgm:scene3d>
+    <dgm:sp3d/>
+    <dgm:txPr/>
+    <dgm:style>
+      <a:lnRef idx="0">
+        <a:scrgbClr r="0" g="0" b="0"/>
+      </a:lnRef>
+      <a:fillRef idx="1">
+        <a:scrgbClr r="0" g="0" b="0"/>
+      </a:fillRef>
+      <a:effectRef idx="0">
+        <a:scrgbClr r="0" g="0" b="0"/>
+      </a:effectRef>
+      <a:fontRef idx="minor"/>
+    </dgm:style>
+  </dgm:styleLbl>
+  <dgm:styleLbl name="dkBgShp">
+    <dgm:scene3d>
+      <a:camera prst="orthographicFront"/>
+      <a:lightRig rig="threePt" dir="t"/>
+    </dgm:scene3d>
+    <dgm:sp3d/>
+    <dgm:txPr/>
+    <dgm:style>
+      <a:lnRef idx="0">
+        <a:scrgbClr r="0" g="0" b="0"/>
+      </a:lnRef>
+      <a:fillRef idx="1">
+        <a:scrgbClr r="0" g="0" b="0"/>
+      </a:fillRef>
+      <a:effectRef idx="0">
+        <a:scrgbClr r="0" g="0" b="0"/>
+      </a:effectRef>
+      <a:fontRef idx="minor"/>
+    </dgm:style>
+  </dgm:styleLbl>
+  <dgm:styleLbl name="trBgShp">
+    <dgm:scene3d>
+      <a:camera prst="orthographicFront"/>
+      <a:lightRig rig="threePt" dir="t"/>
+    </dgm:scene3d>
+    <dgm:sp3d/>
+    <dgm:txPr/>
+    <dgm:style>
+      <a:lnRef idx="0">
+        <a:scrgbClr r="0" g="0" b="0"/>
+      </a:lnRef>
+      <a:fillRef idx="1">
+        <a:scrgbClr r="0" g="0" b="0"/>
+      </a:fillRef>
+      <a:effectRef idx="0">
+        <a:scrgbClr r="0" g="0" b="0"/>
+      </a:effectRef>
+      <a:fontRef idx="minor"/>
+    </dgm:style>
+  </dgm:styleLbl>
+  <dgm:styleLbl name="fgShp">
+    <dgm:scene3d>
+      <a:camera prst="orthographicFront"/>
+      <a:lightRig rig="threePt" dir="t"/>
+    </dgm:scene3d>
+    <dgm:sp3d/>
+    <dgm:txPr/>
+    <dgm:style>
+      <a:lnRef idx="2">
+        <a:scrgbClr r="0" g="0" b="0"/>
+      </a:lnRef>
+      <a:fillRef idx="1">
+        <a:scrgbClr r="0" g="0" b="0"/>
+      </a:fillRef>
+      <a:effectRef idx="0">
+        <a:scrgbClr r="0" g="0" b="0"/>
+      </a:effectRef>
+      <a:fontRef idx="minor"/>
+    </dgm:style>
+  </dgm:styleLbl>
+  <dgm:styleLbl name="revTx">
+    <dgm:scene3d>
+      <a:camera prst="orthographicFront"/>
+      <a:lightRig rig="threePt" dir="t"/>
+    </dgm:scene3d>
+    <dgm:sp3d/>
+    <dgm:txPr/>
+    <dgm:style>
+      <a:lnRef idx="0">
+        <a:scrgbClr r="0" g="0" b="0"/>
+      </a:lnRef>
+      <a:fillRef idx="0">
+        <a:scrgbClr r="0" g="0" b="0"/>
+      </a:fillRef>
+      <a:effectRef idx="0">
+        <a:scrgbClr r="0" g="0" b="0"/>
+      </a:effectRef>
+      <a:fontRef idx="minor"/>
+    </dgm:style>
+  </dgm:styleLbl>
+</dgm:styleDef>
+</file>
+
 <file path=ppt/slideLayouts/slideLayout1.xml><?xml version="1.0" encoding="utf-8"?>
 <p:sldLayout xmlns:a="http://schemas.openxmlformats.org/drawingml/2006/main" xmlns:r="http://schemas.openxmlformats.org/officeDocument/2006/relationships" xmlns:p="http://schemas.openxmlformats.org/presentationml/2006/main" type="title" preserve="1">
   <p:cSld name="标题幻灯片">
@@ -266,7 +2628,7 @@
           <a:p>
             <a:fld id="{DE6D14E8-1196-E442-81CA-5B1ACDAA6D2C}" type="datetimeFigureOut">
               <a:rPr kumimoji="1" lang="zh-CN" altLang="en-US" smtClean="0"/>
-              <a:t>2026/10/9</a:t>
+              <a:t>2026/10/13</a:t>
             </a:fld>
             <a:endParaRPr kumimoji="1" lang="zh-CN" altLang="en-US"/>
           </a:p>
@@ -464,7 +2826,7 @@
           <a:p>
             <a:fld id="{DE6D14E8-1196-E442-81CA-5B1ACDAA6D2C}" type="datetimeFigureOut">
               <a:rPr kumimoji="1" lang="zh-CN" altLang="en-US" smtClean="0"/>
-              <a:t>2026/10/9</a:t>
+              <a:t>2026/10/13</a:t>
             </a:fld>
             <a:endParaRPr kumimoji="1" lang="zh-CN" altLang="en-US"/>
           </a:p>
@@ -672,7 +3034,7 @@
           <a:p>
             <a:fld id="{DE6D14E8-1196-E442-81CA-5B1ACDAA6D2C}" type="datetimeFigureOut">
               <a:rPr kumimoji="1" lang="zh-CN" altLang="en-US" smtClean="0"/>
-              <a:t>2026/10/9</a:t>
+              <a:t>2026/10/13</a:t>
             </a:fld>
             <a:endParaRPr kumimoji="1" lang="zh-CN" altLang="en-US"/>
           </a:p>
@@ -870,7 +3232,7 @@
           <a:p>
             <a:fld id="{DE6D14E8-1196-E442-81CA-5B1ACDAA6D2C}" type="datetimeFigureOut">
               <a:rPr kumimoji="1" lang="zh-CN" altLang="en-US" smtClean="0"/>
-              <a:t>2026/10/9</a:t>
+              <a:t>2026/10/13</a:t>
             </a:fld>
             <a:endParaRPr kumimoji="1" lang="zh-CN" altLang="en-US"/>
           </a:p>
@@ -1145,7 +3507,7 @@
           <a:p>
             <a:fld id="{DE6D14E8-1196-E442-81CA-5B1ACDAA6D2C}" type="datetimeFigureOut">
               <a:rPr kumimoji="1" lang="zh-CN" altLang="en-US" smtClean="0"/>
-              <a:t>2026/10/9</a:t>
+              <a:t>2026/10/13</a:t>
             </a:fld>
             <a:endParaRPr kumimoji="1" lang="zh-CN" altLang="en-US"/>
           </a:p>
@@ -1410,7 +3772,7 @@
           <a:p>
             <a:fld id="{DE6D14E8-1196-E442-81CA-5B1ACDAA6D2C}" type="datetimeFigureOut">
               <a:rPr kumimoji="1" lang="zh-CN" altLang="en-US" smtClean="0"/>
-              <a:t>2026/10/9</a:t>
+              <a:t>2026/10/13</a:t>
             </a:fld>
             <a:endParaRPr kumimoji="1" lang="zh-CN" altLang="en-US"/>
           </a:p>
@@ -1822,7 +4184,7 @@
           <a:p>
             <a:fld id="{DE6D14E8-1196-E442-81CA-5B1ACDAA6D2C}" type="datetimeFigureOut">
               <a:rPr kumimoji="1" lang="zh-CN" altLang="en-US" smtClean="0"/>
-              <a:t>2026/10/9</a:t>
+              <a:t>2026/10/13</a:t>
             </a:fld>
             <a:endParaRPr kumimoji="1" lang="zh-CN" altLang="en-US"/>
           </a:p>
@@ -1963,7 +4325,7 @@
           <a:p>
             <a:fld id="{DE6D14E8-1196-E442-81CA-5B1ACDAA6D2C}" type="datetimeFigureOut">
               <a:rPr kumimoji="1" lang="zh-CN" altLang="en-US" smtClean="0"/>
-              <a:t>2026/10/9</a:t>
+              <a:t>2026/10/13</a:t>
             </a:fld>
             <a:endParaRPr kumimoji="1" lang="zh-CN" altLang="en-US"/>
           </a:p>
@@ -2076,7 +4438,7 @@
           <a:p>
             <a:fld id="{DE6D14E8-1196-E442-81CA-5B1ACDAA6D2C}" type="datetimeFigureOut">
               <a:rPr kumimoji="1" lang="zh-CN" altLang="en-US" smtClean="0"/>
-              <a:t>2026/10/9</a:t>
+              <a:t>2026/10/13</a:t>
             </a:fld>
             <a:endParaRPr kumimoji="1" lang="zh-CN" altLang="en-US"/>
           </a:p>
@@ -2387,7 +4749,7 @@
           <a:p>
             <a:fld id="{DE6D14E8-1196-E442-81CA-5B1ACDAA6D2C}" type="datetimeFigureOut">
               <a:rPr kumimoji="1" lang="zh-CN" altLang="en-US" smtClean="0"/>
-              <a:t>2026/10/9</a:t>
+              <a:t>2026/10/13</a:t>
             </a:fld>
             <a:endParaRPr kumimoji="1" lang="zh-CN" altLang="en-US"/>
           </a:p>
@@ -2675,7 +5037,7 @@
           <a:p>
             <a:fld id="{DE6D14E8-1196-E442-81CA-5B1ACDAA6D2C}" type="datetimeFigureOut">
               <a:rPr kumimoji="1" lang="zh-CN" altLang="en-US" smtClean="0"/>
-              <a:t>2026/10/9</a:t>
+              <a:t>2026/10/13</a:t>
             </a:fld>
             <a:endParaRPr kumimoji="1" lang="zh-CN" altLang="en-US"/>
           </a:p>
@@ -2916,7 +5278,7 @@
           <a:p>
             <a:fld id="{DE6D14E8-1196-E442-81CA-5B1ACDAA6D2C}" type="datetimeFigureOut">
               <a:rPr kumimoji="1" lang="zh-CN" altLang="en-US" smtClean="0"/>
-              <a:t>2026/10/9</a:t>
+              <a:t>2026/10/13</a:t>
             </a:fld>
             <a:endParaRPr kumimoji="1" lang="zh-CN" altLang="en-US"/>
           </a:p>
@@ -4106,6 +6468,896 @@
           <a:chExt cx="0" cy="0"/>
         </a:xfrm>
       </p:grpSpPr>
+      <p:sp>
+        <p:nvSpPr>
+          <p:cNvPr id="2" name="object 2" descr="$PPTXTitle">
+            <a:extLst>
+              <a:ext uri="{FF2B5EF4-FFF2-40B4-BE49-F238E27FC236}">
+                <a16:creationId xmlns:a16="http://schemas.microsoft.com/office/drawing/2014/main" id="{09874DD9-4467-3B81-177A-45C9F227B508}"/>
+              </a:ext>
+            </a:extLst>
+          </p:cNvPr>
+          <p:cNvSpPr txBox="1">
+            <a:spLocks/>
+          </p:cNvSpPr>
+          <p:nvPr/>
+        </p:nvSpPr>
+        <p:spPr>
+          <a:xfrm>
+            <a:off x="617321" y="427481"/>
+            <a:ext cx="2059939" cy="635000"/>
+          </a:xfrm>
+          <a:prstGeom prst="rect">
+            <a:avLst/>
+          </a:prstGeom>
+        </p:spPr>
+        <p:txBody>
+          <a:bodyPr vert="horz" wrap="square" lIns="0" tIns="12065" rIns="0" bIns="0" rtlCol="0" anchor="b">
+            <a:spAutoFit/>
+          </a:bodyPr>
+          <a:lstStyle>
+            <a:lvl1pPr algn="ctr" defTabSz="914400" rtl="0" eaLnBrk="1" latinLnBrk="0" hangingPunct="1">
+              <a:lnSpc>
+                <a:spcPct val="90000"/>
+              </a:lnSpc>
+              <a:spcBef>
+                <a:spcPct val="0"/>
+              </a:spcBef>
+              <a:buNone/>
+              <a:defRPr sz="6000" kern="1200">
+                <a:solidFill>
+                  <a:schemeClr val="tx1"/>
+                </a:solidFill>
+                <a:latin typeface="+mj-lt"/>
+                <a:ea typeface="+mj-ea"/>
+                <a:cs typeface="+mj-cs"/>
+              </a:defRPr>
+            </a:lvl1pPr>
+          </a:lstStyle>
+          <a:p>
+            <a:pPr marL="12700">
+              <a:lnSpc>
+                <a:spcPct val="100000"/>
+              </a:lnSpc>
+              <a:spcBef>
+                <a:spcPts val="95"/>
+              </a:spcBef>
+            </a:pPr>
+            <a:r>
+              <a:rPr lang="zh-CN" altLang="en-US" sz="4000" b="1" spc="-45">
+                <a:solidFill>
+                  <a:srgbClr val="001F5F"/>
+                </a:solidFill>
+                <a:latin typeface="Lantinghei SC Heavy"/>
+                <a:cs typeface="Lantinghei SC Heavy"/>
+              </a:rPr>
+              <a:t>压电效应</a:t>
+            </a:r>
+            <a:endParaRPr lang="zh-CN" altLang="en-US" sz="4000">
+              <a:latin typeface="Lantinghei SC Heavy"/>
+              <a:cs typeface="Lantinghei SC Heavy"/>
+            </a:endParaRPr>
+          </a:p>
+        </p:txBody>
+      </p:sp>
+      <p:sp>
+        <p:nvSpPr>
+          <p:cNvPr id="3" name="object 3">
+            <a:extLst>
+              <a:ext uri="{FF2B5EF4-FFF2-40B4-BE49-F238E27FC236}">
+                <a16:creationId xmlns:a16="http://schemas.microsoft.com/office/drawing/2014/main" id="{18525E6A-8E77-3912-0962-E4DAF3508733}"/>
+              </a:ext>
+            </a:extLst>
+          </p:cNvPr>
+          <p:cNvSpPr txBox="1"/>
+          <p:nvPr/>
+        </p:nvSpPr>
+        <p:spPr>
+          <a:xfrm>
+            <a:off x="742594" y="3245942"/>
+            <a:ext cx="1804670" cy="636270"/>
+          </a:xfrm>
+          <a:prstGeom prst="rect">
+            <a:avLst/>
+          </a:prstGeom>
+        </p:spPr>
+        <p:txBody>
+          <a:bodyPr vert="horz" wrap="square" lIns="0" tIns="13335" rIns="0" bIns="0" rtlCol="0">
+            <a:spAutoFit/>
+          </a:bodyPr>
+          <a:lstStyle/>
+          <a:p>
+            <a:pPr marL="12700">
+              <a:lnSpc>
+                <a:spcPct val="100000"/>
+              </a:lnSpc>
+              <a:spcBef>
+                <a:spcPts val="105"/>
+              </a:spcBef>
+            </a:pPr>
+            <a:r>
+              <a:rPr sz="2000" spc="-20" dirty="0">
+                <a:solidFill>
+                  <a:srgbClr val="C00000"/>
+                </a:solidFill>
+                <a:latin typeface="Lantinghei SC Extralight"/>
+                <a:cs typeface="Lantinghei SC Extralight"/>
+              </a:rPr>
+              <a:t>未受电场及应力</a:t>
+            </a:r>
+            <a:endParaRPr sz="2000">
+              <a:latin typeface="Lantinghei SC Extralight"/>
+              <a:cs typeface="Lantinghei SC Extralight"/>
+            </a:endParaRPr>
+          </a:p>
+          <a:p>
+            <a:pPr marL="12700">
+              <a:lnSpc>
+                <a:spcPct val="100000"/>
+              </a:lnSpc>
+            </a:pPr>
+            <a:r>
+              <a:rPr sz="2000" spc="-20" dirty="0">
+                <a:solidFill>
+                  <a:srgbClr val="C00000"/>
+                </a:solidFill>
+                <a:latin typeface="Lantinghei SC Extralight"/>
+                <a:cs typeface="Lantinghei SC Extralight"/>
+              </a:rPr>
+              <a:t>影响之前</a:t>
+            </a:r>
+            <a:endParaRPr sz="2000">
+              <a:latin typeface="Lantinghei SC Extralight"/>
+              <a:cs typeface="Lantinghei SC Extralight"/>
+            </a:endParaRPr>
+          </a:p>
+        </p:txBody>
+      </p:sp>
+      <p:pic>
+        <p:nvPicPr>
+          <p:cNvPr id="4" name="object 4">
+            <a:extLst>
+              <a:ext uri="{FF2B5EF4-FFF2-40B4-BE49-F238E27FC236}">
+                <a16:creationId xmlns:a16="http://schemas.microsoft.com/office/drawing/2014/main" id="{53E6F7A8-C1A1-2985-ECA0-C46EAD48B1AB}"/>
+              </a:ext>
+            </a:extLst>
+          </p:cNvPr>
+          <p:cNvPicPr/>
+          <p:nvPr/>
+        </p:nvPicPr>
+        <p:blipFill>
+          <a:blip r:embed="rId2" cstate="print"/>
+          <a:stretch>
+            <a:fillRect/>
+          </a:stretch>
+        </p:blipFill>
+        <p:spPr>
+          <a:xfrm>
+            <a:off x="568516" y="1661283"/>
+            <a:ext cx="2061746" cy="1397291"/>
+          </a:xfrm>
+          <a:prstGeom prst="rect">
+            <a:avLst/>
+          </a:prstGeom>
+        </p:spPr>
+      </p:pic>
+      <p:sp>
+        <p:nvSpPr>
+          <p:cNvPr id="5" name="object 5">
+            <a:extLst>
+              <a:ext uri="{FF2B5EF4-FFF2-40B4-BE49-F238E27FC236}">
+                <a16:creationId xmlns:a16="http://schemas.microsoft.com/office/drawing/2014/main" id="{8B57DF99-3001-6FEB-0C04-5061AA078D2B}"/>
+              </a:ext>
+            </a:extLst>
+          </p:cNvPr>
+          <p:cNvSpPr txBox="1"/>
+          <p:nvPr/>
+        </p:nvSpPr>
+        <p:spPr>
+          <a:xfrm>
+            <a:off x="6047359" y="3603701"/>
+            <a:ext cx="2821305" cy="331470"/>
+          </a:xfrm>
+          <a:prstGeom prst="rect">
+            <a:avLst/>
+          </a:prstGeom>
+        </p:spPr>
+        <p:txBody>
+          <a:bodyPr vert="horz" wrap="square" lIns="0" tIns="13335" rIns="0" bIns="0" rtlCol="0">
+            <a:spAutoFit/>
+          </a:bodyPr>
+          <a:lstStyle/>
+          <a:p>
+            <a:pPr marL="12700">
+              <a:lnSpc>
+                <a:spcPct val="100000"/>
+              </a:lnSpc>
+              <a:spcBef>
+                <a:spcPts val="105"/>
+              </a:spcBef>
+            </a:pPr>
+            <a:r>
+              <a:rPr sz="2000" spc="-20" dirty="0">
+                <a:solidFill>
+                  <a:srgbClr val="C00000"/>
+                </a:solidFill>
+                <a:latin typeface="Lantinghei SC Extralight"/>
+                <a:cs typeface="Lantinghei SC Extralight"/>
+              </a:rPr>
+              <a:t>受电场影响材料产生变形</a:t>
+            </a:r>
+            <a:endParaRPr sz="2000">
+              <a:latin typeface="Lantinghei SC Extralight"/>
+              <a:cs typeface="Lantinghei SC Extralight"/>
+            </a:endParaRPr>
+          </a:p>
+        </p:txBody>
+      </p:sp>
+      <p:grpSp>
+        <p:nvGrpSpPr>
+          <p:cNvPr id="6" name="object 6">
+            <a:extLst>
+              <a:ext uri="{FF2B5EF4-FFF2-40B4-BE49-F238E27FC236}">
+                <a16:creationId xmlns:a16="http://schemas.microsoft.com/office/drawing/2014/main" id="{0AFE80F3-1436-3F92-146F-229FBE7859FE}"/>
+              </a:ext>
+            </a:extLst>
+          </p:cNvPr>
+          <p:cNvGrpSpPr/>
+          <p:nvPr/>
+        </p:nvGrpSpPr>
+        <p:grpSpPr>
+          <a:xfrm>
+            <a:off x="3174846" y="1166027"/>
+            <a:ext cx="2761615" cy="2406650"/>
+            <a:chOff x="3174846" y="1166027"/>
+            <a:chExt cx="2761615" cy="2406650"/>
+          </a:xfrm>
+        </p:grpSpPr>
+        <p:pic>
+          <p:nvPicPr>
+            <p:cNvPr id="7" name="object 7">
+              <a:extLst>
+                <a:ext uri="{FF2B5EF4-FFF2-40B4-BE49-F238E27FC236}">
+                  <a16:creationId xmlns:a16="http://schemas.microsoft.com/office/drawing/2014/main" id="{353FF3D4-86ED-7BF6-C4D6-D8034984C96D}"/>
+                </a:ext>
+              </a:extLst>
+            </p:cNvPr>
+            <p:cNvPicPr/>
+            <p:nvPr/>
+          </p:nvPicPr>
+          <p:blipFill>
+            <a:blip r:embed="rId3" cstate="print"/>
+            <a:stretch>
+              <a:fillRect/>
+            </a:stretch>
+          </p:blipFill>
+          <p:spPr>
+            <a:xfrm>
+              <a:off x="3174846" y="1166027"/>
+              <a:ext cx="2602112" cy="2406228"/>
+            </a:xfrm>
+            <a:prstGeom prst="rect">
+              <a:avLst/>
+            </a:prstGeom>
+          </p:spPr>
+        </p:pic>
+        <p:pic>
+          <p:nvPicPr>
+            <p:cNvPr id="8" name="object 8">
+              <a:extLst>
+                <a:ext uri="{FF2B5EF4-FFF2-40B4-BE49-F238E27FC236}">
+                  <a16:creationId xmlns:a16="http://schemas.microsoft.com/office/drawing/2014/main" id="{9CBA4781-77D7-221E-1BAA-E11DDA7E8962}"/>
+                </a:ext>
+              </a:extLst>
+            </p:cNvPr>
+            <p:cNvPicPr/>
+            <p:nvPr/>
+          </p:nvPicPr>
+          <p:blipFill>
+            <a:blip r:embed="rId4" cstate="print"/>
+            <a:stretch>
+              <a:fillRect/>
+            </a:stretch>
+          </p:blipFill>
+          <p:spPr>
+            <a:xfrm>
+              <a:off x="5442204" y="2161032"/>
+              <a:ext cx="493775" cy="454151"/>
+            </a:xfrm>
+            <a:prstGeom prst="rect">
+              <a:avLst/>
+            </a:prstGeom>
+          </p:spPr>
+        </p:pic>
+        <p:pic>
+          <p:nvPicPr>
+            <p:cNvPr id="9" name="object 9">
+              <a:extLst>
+                <a:ext uri="{FF2B5EF4-FFF2-40B4-BE49-F238E27FC236}">
+                  <a16:creationId xmlns:a16="http://schemas.microsoft.com/office/drawing/2014/main" id="{D48309E5-E8AF-D7E0-2D37-44F099CC42C0}"/>
+                </a:ext>
+              </a:extLst>
+            </p:cNvPr>
+            <p:cNvPicPr/>
+            <p:nvPr/>
+          </p:nvPicPr>
+          <p:blipFill>
+            <a:blip r:embed="rId5" cstate="print"/>
+            <a:stretch>
+              <a:fillRect/>
+            </a:stretch>
+          </p:blipFill>
+          <p:spPr>
+            <a:xfrm>
+              <a:off x="5490972" y="2237232"/>
+              <a:ext cx="423672" cy="300227"/>
+            </a:xfrm>
+            <a:prstGeom prst="rect">
+              <a:avLst/>
+            </a:prstGeom>
+          </p:spPr>
+        </p:pic>
+      </p:grpSp>
+      <p:sp>
+        <p:nvSpPr>
+          <p:cNvPr id="10" name="object 10">
+            <a:extLst>
+              <a:ext uri="{FF2B5EF4-FFF2-40B4-BE49-F238E27FC236}">
+                <a16:creationId xmlns:a16="http://schemas.microsoft.com/office/drawing/2014/main" id="{150CE57F-92F8-E4D2-F8F3-F2D486C1C4CB}"/>
+              </a:ext>
+            </a:extLst>
+          </p:cNvPr>
+          <p:cNvSpPr txBox="1"/>
+          <p:nvPr/>
+        </p:nvSpPr>
+        <p:spPr>
+          <a:xfrm>
+            <a:off x="4257294" y="1066291"/>
+            <a:ext cx="142240" cy="330835"/>
+          </a:xfrm>
+          <a:prstGeom prst="rect">
+            <a:avLst/>
+          </a:prstGeom>
+        </p:spPr>
+        <p:txBody>
+          <a:bodyPr vert="horz" wrap="square" lIns="0" tIns="13335" rIns="0" bIns="0" rtlCol="0">
+            <a:spAutoFit/>
+          </a:bodyPr>
+          <a:lstStyle/>
+          <a:p>
+            <a:pPr marL="12700">
+              <a:lnSpc>
+                <a:spcPct val="100000"/>
+              </a:lnSpc>
+              <a:spcBef>
+                <a:spcPts val="105"/>
+              </a:spcBef>
+            </a:pPr>
+            <a:r>
+              <a:rPr sz="2000" b="1" spc="-360" dirty="0">
+                <a:solidFill>
+                  <a:srgbClr val="6F2F9F"/>
+                </a:solidFill>
+                <a:latin typeface="Arial"/>
+                <a:cs typeface="Arial"/>
+              </a:rPr>
+              <a:t>F</a:t>
+            </a:r>
+            <a:endParaRPr sz="2000">
+              <a:latin typeface="Arial"/>
+              <a:cs typeface="Arial"/>
+            </a:endParaRPr>
+          </a:p>
+        </p:txBody>
+      </p:sp>
+      <p:sp>
+        <p:nvSpPr>
+          <p:cNvPr id="11" name="object 11">
+            <a:extLst>
+              <a:ext uri="{FF2B5EF4-FFF2-40B4-BE49-F238E27FC236}">
+                <a16:creationId xmlns:a16="http://schemas.microsoft.com/office/drawing/2014/main" id="{A4BD4715-8D0E-ADF9-79F3-C1791F834526}"/>
+              </a:ext>
+            </a:extLst>
+          </p:cNvPr>
+          <p:cNvSpPr txBox="1"/>
+          <p:nvPr/>
+        </p:nvSpPr>
+        <p:spPr>
+          <a:xfrm>
+            <a:off x="3222498" y="3200628"/>
+            <a:ext cx="2124710" cy="1201420"/>
+          </a:xfrm>
+          <a:prstGeom prst="rect">
+            <a:avLst/>
+          </a:prstGeom>
+        </p:spPr>
+        <p:txBody>
+          <a:bodyPr vert="horz" wrap="square" lIns="0" tIns="68580" rIns="0" bIns="0" rtlCol="0">
+            <a:spAutoFit/>
+          </a:bodyPr>
+          <a:lstStyle/>
+          <a:p>
+            <a:pPr marL="649605">
+              <a:lnSpc>
+                <a:spcPct val="100000"/>
+              </a:lnSpc>
+              <a:spcBef>
+                <a:spcPts val="540"/>
+              </a:spcBef>
+            </a:pPr>
+            <a:r>
+              <a:rPr sz="2000" b="1" spc="-360" dirty="0">
+                <a:solidFill>
+                  <a:srgbClr val="6F2F9F"/>
+                </a:solidFill>
+                <a:latin typeface="Arial"/>
+                <a:cs typeface="Arial"/>
+              </a:rPr>
+              <a:t>F</a:t>
+            </a:r>
+            <a:endParaRPr sz="2000">
+              <a:latin typeface="Arial"/>
+              <a:cs typeface="Arial"/>
+            </a:endParaRPr>
+          </a:p>
+          <a:p>
+            <a:pPr marL="12700">
+              <a:lnSpc>
+                <a:spcPct val="100000"/>
+              </a:lnSpc>
+              <a:spcBef>
+                <a:spcPts val="440"/>
+              </a:spcBef>
+            </a:pPr>
+            <a:r>
+              <a:rPr sz="2000" spc="-15" dirty="0">
+                <a:solidFill>
+                  <a:srgbClr val="C00000"/>
+                </a:solidFill>
+                <a:latin typeface="Lantinghei SC Extralight"/>
+                <a:cs typeface="Lantinghei SC Extralight"/>
+              </a:rPr>
+              <a:t>应力作用产生电流</a:t>
+            </a:r>
+            <a:endParaRPr sz="2000">
+              <a:latin typeface="Lantinghei SC Extralight"/>
+              <a:cs typeface="Lantinghei SC Extralight"/>
+            </a:endParaRPr>
+          </a:p>
+          <a:p>
+            <a:pPr marL="78105">
+              <a:lnSpc>
+                <a:spcPct val="100000"/>
+              </a:lnSpc>
+              <a:spcBef>
+                <a:spcPts val="1175"/>
+              </a:spcBef>
+            </a:pPr>
+            <a:r>
+              <a:rPr sz="2000" spc="-15" dirty="0">
+                <a:latin typeface="Lantinghei SC Extralight"/>
+                <a:cs typeface="Lantinghei SC Extralight"/>
+              </a:rPr>
+              <a:t>机械能转变为电能</a:t>
+            </a:r>
+            <a:endParaRPr sz="2000">
+              <a:latin typeface="Lantinghei SC Extralight"/>
+              <a:cs typeface="Lantinghei SC Extralight"/>
+            </a:endParaRPr>
+          </a:p>
+        </p:txBody>
+      </p:sp>
+      <p:grpSp>
+        <p:nvGrpSpPr>
+          <p:cNvPr id="12" name="object 12">
+            <a:extLst>
+              <a:ext uri="{FF2B5EF4-FFF2-40B4-BE49-F238E27FC236}">
+                <a16:creationId xmlns:a16="http://schemas.microsoft.com/office/drawing/2014/main" id="{E9AB8A55-6C19-BC0E-ED41-D55BEE987197}"/>
+              </a:ext>
+            </a:extLst>
+          </p:cNvPr>
+          <p:cNvGrpSpPr/>
+          <p:nvPr/>
+        </p:nvGrpSpPr>
+        <p:grpSpPr>
+          <a:xfrm>
+            <a:off x="6085529" y="1267967"/>
+            <a:ext cx="2402205" cy="2252980"/>
+            <a:chOff x="6085529" y="1267967"/>
+            <a:chExt cx="2402205" cy="2252980"/>
+          </a:xfrm>
+        </p:grpSpPr>
+        <p:pic>
+          <p:nvPicPr>
+            <p:cNvPr id="13" name="object 13">
+              <a:extLst>
+                <a:ext uri="{FF2B5EF4-FFF2-40B4-BE49-F238E27FC236}">
+                  <a16:creationId xmlns:a16="http://schemas.microsoft.com/office/drawing/2014/main" id="{128548B6-B9BB-7B5C-7034-2EA99CCF08F9}"/>
+                </a:ext>
+              </a:extLst>
+            </p:cNvPr>
+            <p:cNvPicPr/>
+            <p:nvPr/>
+          </p:nvPicPr>
+          <p:blipFill>
+            <a:blip r:embed="rId6" cstate="print"/>
+            <a:stretch>
+              <a:fillRect/>
+            </a:stretch>
+          </p:blipFill>
+          <p:spPr>
+            <a:xfrm>
+              <a:off x="6085529" y="1284257"/>
+              <a:ext cx="2293503" cy="2236556"/>
+            </a:xfrm>
+            <a:prstGeom prst="rect">
+              <a:avLst/>
+            </a:prstGeom>
+          </p:spPr>
+        </p:pic>
+        <p:pic>
+          <p:nvPicPr>
+            <p:cNvPr id="14" name="object 14">
+              <a:extLst>
+                <a:ext uri="{FF2B5EF4-FFF2-40B4-BE49-F238E27FC236}">
+                  <a16:creationId xmlns:a16="http://schemas.microsoft.com/office/drawing/2014/main" id="{E10E5334-0ED1-33CC-E8D3-283086557E95}"/>
+                </a:ext>
+              </a:extLst>
+            </p:cNvPr>
+            <p:cNvPicPr/>
+            <p:nvPr/>
+          </p:nvPicPr>
+          <p:blipFill>
+            <a:blip r:embed="rId7" cstate="print"/>
+            <a:stretch>
+              <a:fillRect/>
+            </a:stretch>
+          </p:blipFill>
+          <p:spPr>
+            <a:xfrm>
+              <a:off x="8081772" y="1267967"/>
+              <a:ext cx="405383" cy="362712"/>
+            </a:xfrm>
+            <a:prstGeom prst="rect">
+              <a:avLst/>
+            </a:prstGeom>
+          </p:spPr>
+        </p:pic>
+      </p:grpSp>
+      <p:sp>
+        <p:nvSpPr>
+          <p:cNvPr id="15" name="object 15">
+            <a:extLst>
+              <a:ext uri="{FF2B5EF4-FFF2-40B4-BE49-F238E27FC236}">
+                <a16:creationId xmlns:a16="http://schemas.microsoft.com/office/drawing/2014/main" id="{6AB2C80F-E869-C945-57D0-D51360ABE685}"/>
+              </a:ext>
+            </a:extLst>
+          </p:cNvPr>
+          <p:cNvSpPr txBox="1"/>
+          <p:nvPr/>
+        </p:nvSpPr>
+        <p:spPr>
+          <a:xfrm>
+            <a:off x="8162290" y="1280922"/>
+            <a:ext cx="228600" cy="269240"/>
+          </a:xfrm>
+          <a:prstGeom prst="rect">
+            <a:avLst/>
+          </a:prstGeom>
+        </p:spPr>
+        <p:txBody>
+          <a:bodyPr vert="horz" wrap="square" lIns="0" tIns="12065" rIns="0" bIns="0" rtlCol="0">
+            <a:spAutoFit/>
+          </a:bodyPr>
+          <a:lstStyle/>
+          <a:p>
+            <a:pPr marL="12700">
+              <a:lnSpc>
+                <a:spcPct val="100000"/>
+              </a:lnSpc>
+              <a:spcBef>
+                <a:spcPts val="95"/>
+              </a:spcBef>
+            </a:pPr>
+            <a:r>
+              <a:rPr sz="1600" b="1" spc="-50" dirty="0">
+                <a:solidFill>
+                  <a:srgbClr val="C00000"/>
+                </a:solidFill>
+                <a:latin typeface="Lantinghei SC Heavy"/>
+                <a:cs typeface="Lantinghei SC Heavy"/>
+              </a:rPr>
+              <a:t>＋</a:t>
+            </a:r>
+            <a:endParaRPr sz="1600">
+              <a:latin typeface="Lantinghei SC Heavy"/>
+              <a:cs typeface="Lantinghei SC Heavy"/>
+            </a:endParaRPr>
+          </a:p>
+        </p:txBody>
+      </p:sp>
+      <p:grpSp>
+        <p:nvGrpSpPr>
+          <p:cNvPr id="16" name="object 16">
+            <a:extLst>
+              <a:ext uri="{FF2B5EF4-FFF2-40B4-BE49-F238E27FC236}">
+                <a16:creationId xmlns:a16="http://schemas.microsoft.com/office/drawing/2014/main" id="{51DE557D-8FA6-87F4-FCE3-0108D9C873A0}"/>
+              </a:ext>
+            </a:extLst>
+          </p:cNvPr>
+          <p:cNvGrpSpPr/>
+          <p:nvPr/>
+        </p:nvGrpSpPr>
+        <p:grpSpPr>
+          <a:xfrm>
+            <a:off x="8046719" y="3038855"/>
+            <a:ext cx="538480" cy="513715"/>
+            <a:chOff x="8046719" y="3038855"/>
+            <a:chExt cx="538480" cy="513715"/>
+          </a:xfrm>
+        </p:grpSpPr>
+        <p:pic>
+          <p:nvPicPr>
+            <p:cNvPr id="17" name="object 17">
+              <a:extLst>
+                <a:ext uri="{FF2B5EF4-FFF2-40B4-BE49-F238E27FC236}">
+                  <a16:creationId xmlns:a16="http://schemas.microsoft.com/office/drawing/2014/main" id="{DC16675B-28F5-4877-2704-1A77DE79A1BD}"/>
+                </a:ext>
+              </a:extLst>
+            </p:cNvPr>
+            <p:cNvPicPr/>
+            <p:nvPr/>
+          </p:nvPicPr>
+          <p:blipFill>
+            <a:blip r:embed="rId8" cstate="print"/>
+            <a:stretch>
+              <a:fillRect/>
+            </a:stretch>
+          </p:blipFill>
+          <p:spPr>
+            <a:xfrm>
+              <a:off x="8112251" y="3107435"/>
+              <a:ext cx="391668" cy="374903"/>
+            </a:xfrm>
+            <a:prstGeom prst="rect">
+              <a:avLst/>
+            </a:prstGeom>
+          </p:spPr>
+        </p:pic>
+        <p:pic>
+          <p:nvPicPr>
+            <p:cNvPr id="18" name="object 18">
+              <a:extLst>
+                <a:ext uri="{FF2B5EF4-FFF2-40B4-BE49-F238E27FC236}">
+                  <a16:creationId xmlns:a16="http://schemas.microsoft.com/office/drawing/2014/main" id="{3F4FD07F-A17A-94AE-4868-EF392B23E3FD}"/>
+                </a:ext>
+              </a:extLst>
+            </p:cNvPr>
+            <p:cNvPicPr/>
+            <p:nvPr/>
+          </p:nvPicPr>
+          <p:blipFill>
+            <a:blip r:embed="rId9" cstate="print"/>
+            <a:stretch>
+              <a:fillRect/>
+            </a:stretch>
+          </p:blipFill>
+          <p:spPr>
+            <a:xfrm>
+              <a:off x="8046719" y="3038855"/>
+              <a:ext cx="537972" cy="513588"/>
+            </a:xfrm>
+            <a:prstGeom prst="rect">
+              <a:avLst/>
+            </a:prstGeom>
+          </p:spPr>
+        </p:pic>
+      </p:grpSp>
+      <p:sp>
+        <p:nvSpPr>
+          <p:cNvPr id="19" name="object 19">
+            <a:extLst>
+              <a:ext uri="{FF2B5EF4-FFF2-40B4-BE49-F238E27FC236}">
+                <a16:creationId xmlns:a16="http://schemas.microsoft.com/office/drawing/2014/main" id="{8148FA3A-2ECF-43AC-A3D5-5D88F896DC1D}"/>
+              </a:ext>
+            </a:extLst>
+          </p:cNvPr>
+          <p:cNvSpPr txBox="1"/>
+          <p:nvPr/>
+        </p:nvSpPr>
+        <p:spPr>
+          <a:xfrm>
+            <a:off x="8179054" y="3109671"/>
+            <a:ext cx="254635" cy="300355"/>
+          </a:xfrm>
+          <a:prstGeom prst="rect">
+            <a:avLst/>
+          </a:prstGeom>
+        </p:spPr>
+        <p:txBody>
+          <a:bodyPr vert="horz" wrap="square" lIns="0" tIns="12700" rIns="0" bIns="0" rtlCol="0">
+            <a:spAutoFit/>
+          </a:bodyPr>
+          <a:lstStyle/>
+          <a:p>
+            <a:pPr marL="12700">
+              <a:lnSpc>
+                <a:spcPct val="100000"/>
+              </a:lnSpc>
+              <a:spcBef>
+                <a:spcPts val="100"/>
+              </a:spcBef>
+            </a:pPr>
+            <a:r>
+              <a:rPr sz="1800" b="1" spc="-50" dirty="0">
+                <a:solidFill>
+                  <a:srgbClr val="C00000"/>
+                </a:solidFill>
+                <a:latin typeface="Lantinghei SC Heavy"/>
+                <a:cs typeface="Lantinghei SC Heavy"/>
+              </a:rPr>
+              <a:t>－</a:t>
+            </a:r>
+            <a:endParaRPr sz="1800">
+              <a:latin typeface="Lantinghei SC Heavy"/>
+              <a:cs typeface="Lantinghei SC Heavy"/>
+            </a:endParaRPr>
+          </a:p>
+        </p:txBody>
+      </p:sp>
+      <p:sp>
+        <p:nvSpPr>
+          <p:cNvPr id="20" name="object 20">
+            <a:extLst>
+              <a:ext uri="{FF2B5EF4-FFF2-40B4-BE49-F238E27FC236}">
+                <a16:creationId xmlns:a16="http://schemas.microsoft.com/office/drawing/2014/main" id="{7EAA7200-B5E0-0646-B9A1-9B23454DAD6C}"/>
+              </a:ext>
+            </a:extLst>
+          </p:cNvPr>
+          <p:cNvSpPr txBox="1"/>
+          <p:nvPr/>
+        </p:nvSpPr>
+        <p:spPr>
+          <a:xfrm>
+            <a:off x="6730745" y="3171520"/>
+            <a:ext cx="142875" cy="331470"/>
+          </a:xfrm>
+          <a:prstGeom prst="rect">
+            <a:avLst/>
+          </a:prstGeom>
+        </p:spPr>
+        <p:txBody>
+          <a:bodyPr vert="horz" wrap="square" lIns="0" tIns="13335" rIns="0" bIns="0" rtlCol="0">
+            <a:spAutoFit/>
+          </a:bodyPr>
+          <a:lstStyle/>
+          <a:p>
+            <a:pPr marL="12700">
+              <a:lnSpc>
+                <a:spcPct val="100000"/>
+              </a:lnSpc>
+              <a:spcBef>
+                <a:spcPts val="105"/>
+              </a:spcBef>
+            </a:pPr>
+            <a:r>
+              <a:rPr sz="2000" b="1" spc="-360" dirty="0">
+                <a:solidFill>
+                  <a:srgbClr val="6F2F9F"/>
+                </a:solidFill>
+                <a:latin typeface="Arial"/>
+                <a:cs typeface="Arial"/>
+              </a:rPr>
+              <a:t>F</a:t>
+            </a:r>
+            <a:endParaRPr sz="2000">
+              <a:latin typeface="Arial"/>
+              <a:cs typeface="Arial"/>
+            </a:endParaRPr>
+          </a:p>
+        </p:txBody>
+      </p:sp>
+      <p:sp>
+        <p:nvSpPr>
+          <p:cNvPr id="21" name="object 21">
+            <a:extLst>
+              <a:ext uri="{FF2B5EF4-FFF2-40B4-BE49-F238E27FC236}">
+                <a16:creationId xmlns:a16="http://schemas.microsoft.com/office/drawing/2014/main" id="{FEF74C7D-5AC8-14BD-621A-686761DB7A91}"/>
+              </a:ext>
+            </a:extLst>
+          </p:cNvPr>
+          <p:cNvSpPr txBox="1"/>
+          <p:nvPr/>
+        </p:nvSpPr>
+        <p:spPr>
+          <a:xfrm>
+            <a:off x="6621018" y="1217802"/>
+            <a:ext cx="142240" cy="330835"/>
+          </a:xfrm>
+          <a:prstGeom prst="rect">
+            <a:avLst/>
+          </a:prstGeom>
+        </p:spPr>
+        <p:txBody>
+          <a:bodyPr vert="horz" wrap="square" lIns="0" tIns="13335" rIns="0" bIns="0" rtlCol="0">
+            <a:spAutoFit/>
+          </a:bodyPr>
+          <a:lstStyle/>
+          <a:p>
+            <a:pPr marL="12700">
+              <a:lnSpc>
+                <a:spcPct val="100000"/>
+              </a:lnSpc>
+              <a:spcBef>
+                <a:spcPts val="105"/>
+              </a:spcBef>
+            </a:pPr>
+            <a:r>
+              <a:rPr sz="2000" b="1" spc="-360" dirty="0">
+                <a:solidFill>
+                  <a:srgbClr val="6F2F9F"/>
+                </a:solidFill>
+                <a:latin typeface="Arial"/>
+                <a:cs typeface="Arial"/>
+              </a:rPr>
+              <a:t>F</a:t>
+            </a:r>
+            <a:endParaRPr sz="2000">
+              <a:latin typeface="Arial"/>
+              <a:cs typeface="Arial"/>
+            </a:endParaRPr>
+          </a:p>
+        </p:txBody>
+      </p:sp>
+      <p:sp>
+        <p:nvSpPr>
+          <p:cNvPr id="22" name="object 22">
+            <a:extLst>
+              <a:ext uri="{FF2B5EF4-FFF2-40B4-BE49-F238E27FC236}">
+                <a16:creationId xmlns:a16="http://schemas.microsoft.com/office/drawing/2014/main" id="{B21DD09C-E364-AD30-993B-D849FE203C92}"/>
+              </a:ext>
+            </a:extLst>
+          </p:cNvPr>
+          <p:cNvSpPr txBox="1"/>
+          <p:nvPr/>
+        </p:nvSpPr>
+        <p:spPr>
+          <a:xfrm>
+            <a:off x="6169533" y="4110990"/>
+            <a:ext cx="2059305" cy="330835"/>
+          </a:xfrm>
+          <a:prstGeom prst="rect">
+            <a:avLst/>
+          </a:prstGeom>
+        </p:spPr>
+        <p:txBody>
+          <a:bodyPr vert="horz" wrap="square" lIns="0" tIns="12700" rIns="0" bIns="0" rtlCol="0">
+            <a:spAutoFit/>
+          </a:bodyPr>
+          <a:lstStyle/>
+          <a:p>
+            <a:pPr marL="12700">
+              <a:lnSpc>
+                <a:spcPct val="100000"/>
+              </a:lnSpc>
+              <a:spcBef>
+                <a:spcPts val="100"/>
+              </a:spcBef>
+            </a:pPr>
+            <a:r>
+              <a:rPr sz="2000" spc="-15" dirty="0">
+                <a:latin typeface="Lantinghei SC Extralight"/>
+                <a:cs typeface="Lantinghei SC Extralight"/>
+              </a:rPr>
+              <a:t>电能转变为机械能</a:t>
+            </a:r>
+            <a:endParaRPr sz="2000">
+              <a:latin typeface="Lantinghei SC Extralight"/>
+              <a:cs typeface="Lantinghei SC Extralight"/>
+            </a:endParaRPr>
+          </a:p>
+        </p:txBody>
+      </p:sp>
     </p:spTree>
     <p:extLst>
       <p:ext uri="{BB962C8B-B14F-4D97-AF65-F5344CB8AC3E}">
@@ -4142,6 +7394,486 @@
           <a:chExt cx="0" cy="0"/>
         </a:xfrm>
       </p:grpSpPr>
+      <p:grpSp>
+        <p:nvGrpSpPr>
+          <p:cNvPr id="26" name="组合 25">
+            <a:extLst>
+              <a:ext uri="{FF2B5EF4-FFF2-40B4-BE49-F238E27FC236}">
+                <a16:creationId xmlns:a16="http://schemas.microsoft.com/office/drawing/2014/main" id="{838C3D64-0A7E-BA9D-0E34-0F9AD33831F2}"/>
+              </a:ext>
+            </a:extLst>
+          </p:cNvPr>
+          <p:cNvGrpSpPr/>
+          <p:nvPr/>
+        </p:nvGrpSpPr>
+        <p:grpSpPr>
+          <a:xfrm>
+            <a:off x="827668" y="942690"/>
+            <a:ext cx="8023661" cy="3952695"/>
+            <a:chOff x="827668" y="942690"/>
+            <a:chExt cx="8023661" cy="3952695"/>
+          </a:xfrm>
+        </p:grpSpPr>
+        <p:graphicFrame>
+          <p:nvGraphicFramePr>
+            <p:cNvPr id="2" name="图示 1">
+              <a:extLst>
+                <a:ext uri="{FF2B5EF4-FFF2-40B4-BE49-F238E27FC236}">
+                  <a16:creationId xmlns:a16="http://schemas.microsoft.com/office/drawing/2014/main" id="{74B6B2DF-432A-D19E-6CB6-4D3E565B823D}"/>
+                </a:ext>
+              </a:extLst>
+            </p:cNvPr>
+            <p:cNvGraphicFramePr/>
+            <p:nvPr>
+              <p:extLst>
+                <p:ext uri="{D42A27DB-BD31-4B8C-83A1-F6EECF244321}">
+                  <p14:modId xmlns:p14="http://schemas.microsoft.com/office/powerpoint/2010/main" val="1136230141"/>
+                </p:ext>
+              </p:extLst>
+            </p:nvPr>
+          </p:nvGraphicFramePr>
+          <p:xfrm>
+            <a:off x="827668" y="942690"/>
+            <a:ext cx="845015" cy="3952695"/>
+          </p:xfrm>
+          <a:graphic>
+            <a:graphicData uri="http://schemas.openxmlformats.org/drawingml/2006/diagram">
+              <dgm:relIds xmlns:dgm="http://schemas.openxmlformats.org/drawingml/2006/diagram" xmlns:r="http://schemas.openxmlformats.org/officeDocument/2006/relationships" r:dm="rId2" r:lo="rId3" r:qs="rId4" r:cs="rId5"/>
+            </a:graphicData>
+          </a:graphic>
+        </p:graphicFrame>
+        <p:cxnSp>
+          <p:nvCxnSpPr>
+            <p:cNvPr id="4" name="直线箭头连接符 3">
+              <a:extLst>
+                <a:ext uri="{FF2B5EF4-FFF2-40B4-BE49-F238E27FC236}">
+                  <a16:creationId xmlns:a16="http://schemas.microsoft.com/office/drawing/2014/main" id="{8BF49C1E-A361-9D68-4F31-965807179BC7}"/>
+                </a:ext>
+              </a:extLst>
+            </p:cNvPr>
+            <p:cNvCxnSpPr>
+              <a:cxnSpLocks/>
+              <a:stCxn id="2" idx="3"/>
+              <a:endCxn id="7" idx="1"/>
+            </p:cNvCxnSpPr>
+            <p:nvPr/>
+          </p:nvCxnSpPr>
+          <p:spPr>
+            <a:xfrm>
+              <a:off x="1672683" y="2919037"/>
+              <a:ext cx="1024053" cy="0"/>
+            </a:xfrm>
+            <a:prstGeom prst="straightConnector1">
+              <a:avLst/>
+            </a:prstGeom>
+            <a:ln w="38100">
+              <a:tailEnd type="triangle"/>
+            </a:ln>
+          </p:spPr>
+          <p:style>
+            <a:lnRef idx="2">
+              <a:schemeClr val="accent1"/>
+            </a:lnRef>
+            <a:fillRef idx="0">
+              <a:schemeClr val="accent1"/>
+            </a:fillRef>
+            <a:effectRef idx="1">
+              <a:schemeClr val="accent1"/>
+            </a:effectRef>
+            <a:fontRef idx="minor">
+              <a:schemeClr val="tx1"/>
+            </a:fontRef>
+          </p:style>
+        </p:cxnSp>
+        <p:sp>
+          <p:nvSpPr>
+            <p:cNvPr id="7" name="矩形 6">
+              <a:extLst>
+                <a:ext uri="{FF2B5EF4-FFF2-40B4-BE49-F238E27FC236}">
+                  <a16:creationId xmlns:a16="http://schemas.microsoft.com/office/drawing/2014/main" id="{EAACBD07-D6FE-A8E0-0D4E-38AF50CF3C66}"/>
+                </a:ext>
+              </a:extLst>
+            </p:cNvPr>
+            <p:cNvSpPr/>
+            <p:nvPr/>
+          </p:nvSpPr>
+          <p:spPr>
+            <a:xfrm>
+              <a:off x="2696736" y="2684861"/>
+              <a:ext cx="970156" cy="468352"/>
+            </a:xfrm>
+            <a:prstGeom prst="rect">
+              <a:avLst/>
+            </a:prstGeom>
+          </p:spPr>
+          <p:style>
+            <a:lnRef idx="2">
+              <a:schemeClr val="accent1">
+                <a:shade val="15000"/>
+              </a:schemeClr>
+            </a:lnRef>
+            <a:fillRef idx="1">
+              <a:schemeClr val="accent1"/>
+            </a:fillRef>
+            <a:effectRef idx="0">
+              <a:schemeClr val="accent1"/>
+            </a:effectRef>
+            <a:fontRef idx="minor">
+              <a:schemeClr val="lt1"/>
+            </a:fontRef>
+          </p:style>
+          <p:txBody>
+            <a:bodyPr rtlCol="0" anchor="ctr"/>
+            <a:lstStyle/>
+            <a:p>
+              <a:pPr algn="ctr"/>
+              <a:r>
+                <a:rPr kumimoji="1" lang="zh-CN" altLang="en-US" dirty="0"/>
+                <a:t>生料</a:t>
+              </a:r>
+            </a:p>
+          </p:txBody>
+        </p:sp>
+        <p:sp>
+          <p:nvSpPr>
+            <p:cNvPr id="8" name="矩形 7">
+              <a:extLst>
+                <a:ext uri="{FF2B5EF4-FFF2-40B4-BE49-F238E27FC236}">
+                  <a16:creationId xmlns:a16="http://schemas.microsoft.com/office/drawing/2014/main" id="{7E2DC87A-FCC0-2A9D-4195-0814E41BD268}"/>
+                </a:ext>
+              </a:extLst>
+            </p:cNvPr>
+            <p:cNvSpPr/>
+            <p:nvPr/>
+          </p:nvSpPr>
+          <p:spPr>
+            <a:xfrm>
+              <a:off x="5043896" y="2684861"/>
+              <a:ext cx="970156" cy="468352"/>
+            </a:xfrm>
+            <a:prstGeom prst="rect">
+              <a:avLst/>
+            </a:prstGeom>
+          </p:spPr>
+          <p:style>
+            <a:lnRef idx="2">
+              <a:schemeClr val="accent1">
+                <a:shade val="15000"/>
+              </a:schemeClr>
+            </a:lnRef>
+            <a:fillRef idx="1">
+              <a:schemeClr val="accent1"/>
+            </a:fillRef>
+            <a:effectRef idx="0">
+              <a:schemeClr val="accent1"/>
+            </a:effectRef>
+            <a:fontRef idx="minor">
+              <a:schemeClr val="lt1"/>
+            </a:fontRef>
+          </p:style>
+          <p:txBody>
+            <a:bodyPr rtlCol="0" anchor="ctr"/>
+            <a:lstStyle/>
+            <a:p>
+              <a:pPr algn="ctr"/>
+              <a:r>
+                <a:rPr kumimoji="1" lang="zh-CN" altLang="en-US" dirty="0"/>
+                <a:t>水泥</a:t>
+              </a:r>
+            </a:p>
+          </p:txBody>
+        </p:sp>
+        <p:cxnSp>
+          <p:nvCxnSpPr>
+            <p:cNvPr id="12" name="直线箭头连接符 11">
+              <a:extLst>
+                <a:ext uri="{FF2B5EF4-FFF2-40B4-BE49-F238E27FC236}">
+                  <a16:creationId xmlns:a16="http://schemas.microsoft.com/office/drawing/2014/main" id="{1F8AAE7F-2FFC-9F5C-5D76-3A0DD9658153}"/>
+                </a:ext>
+              </a:extLst>
+            </p:cNvPr>
+            <p:cNvCxnSpPr>
+              <a:cxnSpLocks/>
+              <a:stCxn id="7" idx="3"/>
+              <a:endCxn id="8" idx="1"/>
+            </p:cNvCxnSpPr>
+            <p:nvPr/>
+          </p:nvCxnSpPr>
+          <p:spPr>
+            <a:xfrm>
+              <a:off x="3666892" y="2919037"/>
+              <a:ext cx="1377004" cy="0"/>
+            </a:xfrm>
+            <a:prstGeom prst="straightConnector1">
+              <a:avLst/>
+            </a:prstGeom>
+            <a:ln w="38100">
+              <a:tailEnd type="triangle"/>
+            </a:ln>
+          </p:spPr>
+          <p:style>
+            <a:lnRef idx="2">
+              <a:schemeClr val="accent1"/>
+            </a:lnRef>
+            <a:fillRef idx="0">
+              <a:schemeClr val="accent1"/>
+            </a:fillRef>
+            <a:effectRef idx="1">
+              <a:schemeClr val="accent1"/>
+            </a:effectRef>
+            <a:fontRef idx="minor">
+              <a:schemeClr val="tx1"/>
+            </a:fontRef>
+          </p:style>
+        </p:cxnSp>
+        <p:sp>
+          <p:nvSpPr>
+            <p:cNvPr id="16" name="文本框 15">
+              <a:extLst>
+                <a:ext uri="{FF2B5EF4-FFF2-40B4-BE49-F238E27FC236}">
+                  <a16:creationId xmlns:a16="http://schemas.microsoft.com/office/drawing/2014/main" id="{D4939682-6239-46F0-81BB-15008AFF621D}"/>
+                </a:ext>
+              </a:extLst>
+            </p:cNvPr>
+            <p:cNvSpPr txBox="1"/>
+            <p:nvPr/>
+          </p:nvSpPr>
+          <p:spPr>
+            <a:xfrm>
+              <a:off x="1834595" y="2615808"/>
+              <a:ext cx="646331" cy="646331"/>
+            </a:xfrm>
+            <a:prstGeom prst="rect">
+              <a:avLst/>
+            </a:prstGeom>
+            <a:noFill/>
+          </p:spPr>
+          <p:txBody>
+            <a:bodyPr wrap="none" rtlCol="0">
+              <a:spAutoFit/>
+            </a:bodyPr>
+            <a:lstStyle/>
+            <a:p>
+              <a:r>
+                <a:rPr kumimoji="1" lang="zh-CN" altLang="en-US" dirty="0"/>
+                <a:t>磨细</a:t>
+              </a:r>
+              <a:endParaRPr kumimoji="1" lang="en-US" altLang="zh-CN" dirty="0"/>
+            </a:p>
+            <a:p>
+              <a:r>
+                <a:rPr kumimoji="1" lang="zh-CN" altLang="en-US" dirty="0"/>
+                <a:t>均化</a:t>
+              </a:r>
+              <a:endParaRPr kumimoji="1" lang="en-US" altLang="zh-CN" dirty="0"/>
+            </a:p>
+          </p:txBody>
+        </p:sp>
+        <p:sp>
+          <p:nvSpPr>
+            <p:cNvPr id="17" name="文本框 16">
+              <a:extLst>
+                <a:ext uri="{FF2B5EF4-FFF2-40B4-BE49-F238E27FC236}">
+                  <a16:creationId xmlns:a16="http://schemas.microsoft.com/office/drawing/2014/main" id="{4A690A95-458A-6AB9-5712-D9C45C22664C}"/>
+                </a:ext>
+              </a:extLst>
+            </p:cNvPr>
+            <p:cNvSpPr txBox="1"/>
+            <p:nvPr/>
+          </p:nvSpPr>
+          <p:spPr>
+            <a:xfrm>
+              <a:off x="3889561" y="2615808"/>
+              <a:ext cx="931665" cy="646331"/>
+            </a:xfrm>
+            <a:prstGeom prst="rect">
+              <a:avLst/>
+            </a:prstGeom>
+            <a:noFill/>
+          </p:spPr>
+          <p:txBody>
+            <a:bodyPr wrap="none" rtlCol="0">
+              <a:spAutoFit/>
+            </a:bodyPr>
+            <a:lstStyle/>
+            <a:p>
+              <a:r>
+                <a:rPr kumimoji="1" lang="zh-CN" altLang="en-US" dirty="0"/>
+                <a:t>煅烧</a:t>
+              </a:r>
+              <a:endParaRPr kumimoji="1" lang="en-US" altLang="zh-CN" dirty="0"/>
+            </a:p>
+            <a:p>
+              <a:r>
+                <a:rPr kumimoji="1" lang="en-US" altLang="zh-CN" dirty="0"/>
+                <a:t>1450</a:t>
+              </a:r>
+              <a:r>
+                <a:rPr kumimoji="1" lang="zh-CN" altLang="en-US" dirty="0"/>
+                <a:t>度</a:t>
+              </a:r>
+              <a:endParaRPr kumimoji="1" lang="en-US" altLang="zh-CN" dirty="0"/>
+            </a:p>
+          </p:txBody>
+        </p:sp>
+        <p:sp>
+          <p:nvSpPr>
+            <p:cNvPr id="23" name="左大括号 22">
+              <a:extLst>
+                <a:ext uri="{FF2B5EF4-FFF2-40B4-BE49-F238E27FC236}">
+                  <a16:creationId xmlns:a16="http://schemas.microsoft.com/office/drawing/2014/main" id="{9714B632-A243-5966-A0A9-B8BE637A5870}"/>
+                </a:ext>
+              </a:extLst>
+            </p:cNvPr>
+            <p:cNvSpPr/>
+            <p:nvPr/>
+          </p:nvSpPr>
+          <p:spPr>
+            <a:xfrm>
+              <a:off x="6236722" y="1285005"/>
+              <a:ext cx="970157" cy="3268063"/>
+            </a:xfrm>
+            <a:prstGeom prst="leftBrace">
+              <a:avLst/>
+            </a:prstGeom>
+          </p:spPr>
+          <p:style>
+            <a:lnRef idx="2">
+              <a:schemeClr val="accent1"/>
+            </a:lnRef>
+            <a:fillRef idx="0">
+              <a:schemeClr val="accent1"/>
+            </a:fillRef>
+            <a:effectRef idx="1">
+              <a:schemeClr val="accent1"/>
+            </a:effectRef>
+            <a:fontRef idx="minor">
+              <a:schemeClr val="tx1"/>
+            </a:fontRef>
+          </p:style>
+          <p:txBody>
+            <a:bodyPr rtlCol="0" anchor="ctr"/>
+            <a:lstStyle/>
+            <a:p>
+              <a:pPr algn="ctr"/>
+              <a:endParaRPr kumimoji="1" lang="zh-CN" altLang="en-US"/>
+            </a:p>
+          </p:txBody>
+        </p:sp>
+        <p:sp>
+          <p:nvSpPr>
+            <p:cNvPr id="24" name="矩形 23">
+              <a:extLst>
+                <a:ext uri="{FF2B5EF4-FFF2-40B4-BE49-F238E27FC236}">
+                  <a16:creationId xmlns:a16="http://schemas.microsoft.com/office/drawing/2014/main" id="{980502E6-DF83-27AC-F78A-1AA345936DBE}"/>
+                </a:ext>
+              </a:extLst>
+            </p:cNvPr>
+            <p:cNvSpPr/>
+            <p:nvPr/>
+          </p:nvSpPr>
+          <p:spPr>
+            <a:xfrm>
+              <a:off x="7429548" y="1439134"/>
+              <a:ext cx="1421781" cy="2999678"/>
+            </a:xfrm>
+            <a:prstGeom prst="rect">
+              <a:avLst/>
+            </a:prstGeom>
+          </p:spPr>
+          <p:style>
+            <a:lnRef idx="2">
+              <a:schemeClr val="accent1">
+                <a:shade val="15000"/>
+              </a:schemeClr>
+            </a:lnRef>
+            <a:fillRef idx="1">
+              <a:schemeClr val="accent1"/>
+            </a:fillRef>
+            <a:effectRef idx="0">
+              <a:schemeClr val="accent1"/>
+            </a:effectRef>
+            <a:fontRef idx="minor">
+              <a:schemeClr val="lt1"/>
+            </a:fontRef>
+          </p:style>
+          <p:txBody>
+            <a:bodyPr rtlCol="0" anchor="ctr"/>
+            <a:lstStyle/>
+            <a:p>
+              <a:r>
+                <a:rPr kumimoji="1" lang="zh-CN" altLang="en-US" dirty="0"/>
+                <a:t>碳酸三钙</a:t>
+              </a:r>
+              <a:endParaRPr kumimoji="1" lang="en-US" altLang="zh-CN" dirty="0"/>
+            </a:p>
+            <a:p>
+              <a:endParaRPr kumimoji="1" lang="en-US" altLang="zh-CN" dirty="0"/>
+            </a:p>
+            <a:p>
+              <a:r>
+                <a:rPr kumimoji="1" lang="zh-CN" altLang="en-US" dirty="0"/>
+                <a:t>碳酸二钙</a:t>
+              </a:r>
+              <a:endParaRPr kumimoji="1" lang="en-US" altLang="zh-CN" dirty="0"/>
+            </a:p>
+            <a:p>
+              <a:endParaRPr kumimoji="1" lang="en-US" altLang="zh-CN" dirty="0"/>
+            </a:p>
+            <a:p>
+              <a:r>
+                <a:rPr kumimoji="1" lang="zh-CN" altLang="en-US" dirty="0"/>
+                <a:t>铁铝酸四钙</a:t>
+              </a:r>
+              <a:endParaRPr kumimoji="1" lang="en-US" altLang="zh-CN" dirty="0"/>
+            </a:p>
+            <a:p>
+              <a:endParaRPr kumimoji="1" lang="en-US" altLang="zh-CN" dirty="0"/>
+            </a:p>
+            <a:p>
+              <a:r>
+                <a:rPr kumimoji="1" lang="zh-CN" altLang="en-US" dirty="0"/>
+                <a:t>铝酸三钙</a:t>
+              </a:r>
+            </a:p>
+          </p:txBody>
+        </p:sp>
+        <p:sp>
+          <p:nvSpPr>
+            <p:cNvPr id="25" name="文本框 24">
+              <a:extLst>
+                <a:ext uri="{FF2B5EF4-FFF2-40B4-BE49-F238E27FC236}">
+                  <a16:creationId xmlns:a16="http://schemas.microsoft.com/office/drawing/2014/main" id="{5841E042-43CC-4626-9202-BB29B1689C06}"/>
+                </a:ext>
+              </a:extLst>
+            </p:cNvPr>
+            <p:cNvSpPr txBox="1"/>
+            <p:nvPr/>
+          </p:nvSpPr>
+          <p:spPr>
+            <a:xfrm>
+              <a:off x="3181814" y="1285005"/>
+              <a:ext cx="1980029" cy="523220"/>
+            </a:xfrm>
+            <a:prstGeom prst="rect">
+              <a:avLst/>
+            </a:prstGeom>
+            <a:noFill/>
+          </p:spPr>
+          <p:txBody>
+            <a:bodyPr wrap="none" rtlCol="0">
+              <a:spAutoFit/>
+            </a:bodyPr>
+            <a:lstStyle/>
+            <a:p>
+              <a:r>
+                <a:rPr kumimoji="1" lang="zh-CN" altLang="en-US" sz="2800" dirty="0"/>
+                <a:t>水泥的生产</a:t>
+              </a:r>
+            </a:p>
+          </p:txBody>
+        </p:sp>
+      </p:grpSp>
     </p:spTree>
     <p:extLst>
       <p:ext uri="{BB962C8B-B14F-4D97-AF65-F5344CB8AC3E}">
